--- a/output_pptx/You_Alone_Can_Rescue.pptx
+++ b/output_pptx/You_Alone_Can_Rescue.pptx
@@ -3132,23 +3132,23 @@
         </p:nvSpPr>
         <p:spPr>
           <a:xfrm>
-            <a:off x="594360" y="2258568"/>
-            <a:ext cx="11002975" cy="685800"/>
-          </a:xfrm>
-          <a:prstGeom prst="rect">
-            <a:avLst/>
-          </a:prstGeom>
-          <a:noFill/>
-        </p:spPr>
-        <p:txBody>
-          <a:bodyPr wrap="square">
-            <a:spAutoFit/>
-          </a:bodyPr>
-          <a:lstStyle/>
-          <a:p>
-            <a:pPr algn="ctr"/>
-            <a:r>
-              <a:rPr sz="4400" b="1" i="0">
+            <a:off x="640080" y="2052828"/>
+            <a:ext cx="10911535" cy="731520"/>
+          </a:xfrm>
+          <a:prstGeom prst="rect">
+            <a:avLst/>
+          </a:prstGeom>
+          <a:noFill/>
+        </p:spPr>
+        <p:txBody>
+          <a:bodyPr wrap="square">
+            <a:spAutoFit/>
+          </a:bodyPr>
+          <a:lstStyle/>
+          <a:p>
+            <a:pPr algn="ctr"/>
+            <a:r>
+              <a:rPr sz="4800" b="1" i="0">
                 <a:solidFill>
                   <a:srgbClr val="FFFFFF"/>
                 </a:solidFill>
@@ -3167,25 +3167,60 @@
         </p:nvSpPr>
         <p:spPr>
           <a:xfrm>
-            <a:off x="594360" y="2980944"/>
-            <a:ext cx="11002975" cy="347472"/>
-          </a:xfrm>
-          <a:prstGeom prst="rect">
-            <a:avLst/>
-          </a:prstGeom>
-          <a:noFill/>
-        </p:spPr>
-        <p:txBody>
-          <a:bodyPr wrap="square">
-            <a:spAutoFit/>
-          </a:bodyPr>
-          <a:lstStyle/>
-          <a:p>
-            <a:pPr algn="ctr"/>
-            <a:r>
-              <a:rPr sz="2200" b="0" i="1">
-                <a:solidFill>
-                  <a:srgbClr val="8C8C8C"/>
+            <a:off x="640080" y="2985516"/>
+            <a:ext cx="10911535" cy="731520"/>
+          </a:xfrm>
+          <a:prstGeom prst="rect">
+            <a:avLst/>
+          </a:prstGeom>
+          <a:noFill/>
+        </p:spPr>
+        <p:txBody>
+          <a:bodyPr wrap="square">
+            <a:spAutoFit/>
+          </a:bodyPr>
+          <a:lstStyle/>
+          <a:p>
+            <a:pPr algn="ctr"/>
+            <a:r>
+              <a:rPr sz="4800" b="1" i="0">
+                <a:solidFill>
+                  <a:srgbClr val="FFFFFF"/>
+                </a:solidFill>
+                <a:latin typeface="Arial"/>
+              </a:rPr>
+              <a:t>Só Tu podes salvar</a:t>
+            </a:r>
+          </a:p>
+        </p:txBody>
+      </p:sp>
+      <p:sp>
+        <p:nvSpPr>
+          <p:cNvPr id="4" name="TextBox 3"/>
+          <p:cNvSpPr txBox="1"/>
+          <p:nvPr/>
+        </p:nvSpPr>
+        <p:spPr>
+          <a:xfrm>
+            <a:off x="640080" y="4128516"/>
+            <a:ext cx="10911535" cy="310896"/>
+          </a:xfrm>
+          <a:prstGeom prst="rect">
+            <a:avLst/>
+          </a:prstGeom>
+          <a:noFill/>
+        </p:spPr>
+        <p:txBody>
+          <a:bodyPr wrap="square">
+            <a:spAutoFit/>
+          </a:bodyPr>
+          <a:lstStyle/>
+          <a:p>
+            <a:pPr algn="ctr"/>
+            <a:r>
+              <a:rPr sz="2000" b="0" i="0">
+                <a:solidFill>
+                  <a:srgbClr val="828282"/>
                 </a:solidFill>
                 <a:latin typeface="Arial"/>
               </a:rPr>
@@ -3196,66 +3231,31 @@
       </p:sp>
       <p:sp>
         <p:nvSpPr>
-          <p:cNvPr id="4" name="TextBox 3"/>
-          <p:cNvSpPr txBox="1"/>
-          <p:nvPr/>
-        </p:nvSpPr>
-        <p:spPr>
-          <a:xfrm>
-            <a:off x="594360" y="3529584"/>
-            <a:ext cx="11002975" cy="685800"/>
-          </a:xfrm>
-          <a:prstGeom prst="rect">
-            <a:avLst/>
-          </a:prstGeom>
-          <a:noFill/>
-        </p:spPr>
-        <p:txBody>
-          <a:bodyPr wrap="square">
-            <a:spAutoFit/>
-          </a:bodyPr>
-          <a:lstStyle/>
-          <a:p>
-            <a:pPr algn="ctr"/>
-            <a:r>
-              <a:rPr sz="4400" b="1" i="0">
-                <a:solidFill>
-                  <a:srgbClr val="FFFFFF"/>
-                </a:solidFill>
-                <a:latin typeface="Arial"/>
-              </a:rPr>
-              <a:t>Só Tu podes salvar</a:t>
-            </a:r>
-          </a:p>
-        </p:txBody>
-      </p:sp>
-      <p:sp>
-        <p:nvSpPr>
           <p:cNvPr id="5" name="TextBox 4"/>
           <p:cNvSpPr txBox="1"/>
           <p:nvPr/>
         </p:nvSpPr>
         <p:spPr>
           <a:xfrm>
-            <a:off x="594360" y="4251960"/>
-            <a:ext cx="11002975" cy="347472"/>
-          </a:xfrm>
-          <a:prstGeom prst="rect">
-            <a:avLst/>
-          </a:prstGeom>
-          <a:noFill/>
-        </p:spPr>
-        <p:txBody>
-          <a:bodyPr wrap="square">
-            <a:spAutoFit/>
-          </a:bodyPr>
-          <a:lstStyle/>
-          <a:p>
-            <a:pPr algn="ctr"/>
-            <a:r>
-              <a:rPr sz="2200" b="0" i="1">
-                <a:solidFill>
-                  <a:srgbClr val="8C8C8C"/>
+            <a:off x="640080" y="4494276"/>
+            <a:ext cx="10911535" cy="310896"/>
+          </a:xfrm>
+          <a:prstGeom prst="rect">
+            <a:avLst/>
+          </a:prstGeom>
+          <a:noFill/>
+        </p:spPr>
+        <p:txBody>
+          <a:bodyPr wrap="square">
+            <a:spAutoFit/>
+          </a:bodyPr>
+          <a:lstStyle/>
+          <a:p>
+            <a:pPr algn="ctr"/>
+            <a:r>
+              <a:rPr sz="2000" b="0" i="0">
+                <a:solidFill>
+                  <a:srgbClr val="828282"/>
                 </a:solidFill>
                 <a:latin typeface="Arial"/>
               </a:rPr>
@@ -3298,23 +3298,23 @@
         </p:nvSpPr>
         <p:spPr>
           <a:xfrm>
-            <a:off x="594360" y="1837944"/>
-            <a:ext cx="11002975" cy="685800"/>
-          </a:xfrm>
-          <a:prstGeom prst="rect">
-            <a:avLst/>
-          </a:prstGeom>
-          <a:noFill/>
-        </p:spPr>
-        <p:txBody>
-          <a:bodyPr wrap="square">
-            <a:spAutoFit/>
-          </a:bodyPr>
-          <a:lstStyle/>
-          <a:p>
-            <a:pPr algn="ctr"/>
-            <a:r>
-              <a:rPr sz="4400" b="1" i="0">
+            <a:off x="640080" y="1650492"/>
+            <a:ext cx="10911535" cy="731520"/>
+          </a:xfrm>
+          <a:prstGeom prst="rect">
+            <a:avLst/>
+          </a:prstGeom>
+          <a:noFill/>
+        </p:spPr>
+        <p:txBody>
+          <a:bodyPr wrap="square">
+            <a:spAutoFit/>
+          </a:bodyPr>
+          <a:lstStyle/>
+          <a:p>
+            <a:pPr algn="ctr"/>
+            <a:r>
+              <a:rPr sz="4800" b="1" i="0">
                 <a:solidFill>
                   <a:srgbClr val="FFFFFF"/>
                 </a:solidFill>
@@ -3333,8 +3333,8 @@
         </p:nvSpPr>
         <p:spPr>
           <a:xfrm>
-            <a:off x="594360" y="2560320"/>
-            <a:ext cx="11002975" cy="384048"/>
+            <a:off x="640080" y="2418588"/>
+            <a:ext cx="10911535" cy="365760"/>
           </a:xfrm>
           <a:prstGeom prst="rect">
             <a:avLst/>
@@ -3351,7 +3351,7 @@
             <a:r>
               <a:rPr sz="2400" b="0" i="1">
                 <a:solidFill>
-                  <a:srgbClr val="B4B4B4"/>
+                  <a:srgbClr val="AAAAAA"/>
                 </a:solidFill>
                 <a:latin typeface="Arial"/>
               </a:rPr>
@@ -3368,8 +3368,78 @@
         </p:nvSpPr>
         <p:spPr>
           <a:xfrm>
-            <a:off x="594360" y="2980944"/>
-            <a:ext cx="11002975" cy="347472"/>
+            <a:off x="640080" y="2985516"/>
+            <a:ext cx="10911535" cy="731520"/>
+          </a:xfrm>
+          <a:prstGeom prst="rect">
+            <a:avLst/>
+          </a:prstGeom>
+          <a:noFill/>
+        </p:spPr>
+        <p:txBody>
+          <a:bodyPr wrap="square">
+            <a:spAutoFit/>
+          </a:bodyPr>
+          <a:lstStyle/>
+          <a:p>
+            <a:pPr algn="ctr"/>
+            <a:r>
+              <a:rPr sz="4800" b="1" i="0">
+                <a:solidFill>
+                  <a:srgbClr val="FFFFFF"/>
+                </a:solidFill>
+                <a:latin typeface="Arial"/>
+              </a:rPr>
+              <a:t>あなただけをたたえる</a:t>
+            </a:r>
+          </a:p>
+        </p:txBody>
+      </p:sp>
+      <p:sp>
+        <p:nvSpPr>
+          <p:cNvPr id="5" name="TextBox 4"/>
+          <p:cNvSpPr txBox="1"/>
+          <p:nvPr/>
+        </p:nvSpPr>
+        <p:spPr>
+          <a:xfrm>
+            <a:off x="640080" y="3753612"/>
+            <a:ext cx="10911535" cy="365760"/>
+          </a:xfrm>
+          <a:prstGeom prst="rect">
+            <a:avLst/>
+          </a:prstGeom>
+          <a:noFill/>
+        </p:spPr>
+        <p:txBody>
+          <a:bodyPr wrap="square">
+            <a:spAutoFit/>
+          </a:bodyPr>
+          <a:lstStyle/>
+          <a:p>
+            <a:pPr algn="ctr"/>
+            <a:r>
+              <a:rPr sz="2400" b="0" i="1">
+                <a:solidFill>
+                  <a:srgbClr val="AAAAAA"/>
+                </a:solidFill>
+                <a:latin typeface="Arial"/>
+              </a:rPr>
+              <a:t>anata dake wo tataeru</a:t>
+            </a:r>
+          </a:p>
+        </p:txBody>
+      </p:sp>
+      <p:sp>
+        <p:nvSpPr>
+          <p:cNvPr id="6" name="TextBox 5"/>
+          <p:cNvSpPr txBox="1"/>
+          <p:nvPr/>
+        </p:nvSpPr>
+        <p:spPr>
+          <a:xfrm>
+            <a:off x="640080" y="4530852"/>
+            <a:ext cx="10911535" cy="310896"/>
           </a:xfrm>
           <a:prstGeom prst="rect">
             <a:avLst/>
@@ -3386,7 +3456,7 @@
             <a:r>
               <a:rPr sz="2000" b="0" i="1">
                 <a:solidFill>
-                  <a:srgbClr val="8C8C8C"/>
+                  <a:srgbClr val="828282"/>
                 </a:solidFill>
                 <a:latin typeface="Arial"/>
               </a:rPr>
@@ -3397,84 +3467,14 @@
       </p:sp>
       <p:sp>
         <p:nvSpPr>
-          <p:cNvPr id="5" name="TextBox 4"/>
-          <p:cNvSpPr txBox="1"/>
-          <p:nvPr/>
-        </p:nvSpPr>
-        <p:spPr>
-          <a:xfrm>
-            <a:off x="594360" y="3529584"/>
-            <a:ext cx="11002975" cy="685800"/>
-          </a:xfrm>
-          <a:prstGeom prst="rect">
-            <a:avLst/>
-          </a:prstGeom>
-          <a:noFill/>
-        </p:spPr>
-        <p:txBody>
-          <a:bodyPr wrap="square">
-            <a:spAutoFit/>
-          </a:bodyPr>
-          <a:lstStyle/>
-          <a:p>
-            <a:pPr algn="ctr"/>
-            <a:r>
-              <a:rPr sz="4400" b="1" i="0">
-                <a:solidFill>
-                  <a:srgbClr val="FFFFFF"/>
-                </a:solidFill>
-                <a:latin typeface="Arial"/>
-              </a:rPr>
-              <a:t>あなただけをたたえる</a:t>
-            </a:r>
-          </a:p>
-        </p:txBody>
-      </p:sp>
-      <p:sp>
-        <p:nvSpPr>
-          <p:cNvPr id="6" name="TextBox 5"/>
-          <p:cNvSpPr txBox="1"/>
-          <p:nvPr/>
-        </p:nvSpPr>
-        <p:spPr>
-          <a:xfrm>
-            <a:off x="594360" y="4251960"/>
-            <a:ext cx="11002975" cy="384048"/>
-          </a:xfrm>
-          <a:prstGeom prst="rect">
-            <a:avLst/>
-          </a:prstGeom>
-          <a:noFill/>
-        </p:spPr>
-        <p:txBody>
-          <a:bodyPr wrap="square">
-            <a:spAutoFit/>
-          </a:bodyPr>
-          <a:lstStyle/>
-          <a:p>
-            <a:pPr algn="ctr"/>
-            <a:r>
-              <a:rPr sz="2400" b="0" i="1">
-                <a:solidFill>
-                  <a:srgbClr val="B4B4B4"/>
-                </a:solidFill>
-                <a:latin typeface="Arial"/>
-              </a:rPr>
-              <a:t>anata dake wo tataeru</a:t>
-            </a:r>
-          </a:p>
-        </p:txBody>
-      </p:sp>
-      <p:sp>
-        <p:nvSpPr>
           <p:cNvPr id="7" name="TextBox 6"/>
           <p:cNvSpPr txBox="1"/>
           <p:nvPr/>
         </p:nvSpPr>
         <p:spPr>
           <a:xfrm>
-            <a:off x="594360" y="4672584"/>
-            <a:ext cx="11002975" cy="347472"/>
+            <a:off x="640080" y="4896612"/>
+            <a:ext cx="10911535" cy="310896"/>
           </a:xfrm>
           <a:prstGeom prst="rect">
             <a:avLst/>
@@ -3491,7 +3491,7 @@
             <a:r>
               <a:rPr sz="2000" b="0" i="1">
                 <a:solidFill>
-                  <a:srgbClr val="8C8C8C"/>
+                  <a:srgbClr val="828282"/>
                 </a:solidFill>
                 <a:latin typeface="Arial"/>
               </a:rPr>
@@ -3534,23 +3534,23 @@
         </p:nvSpPr>
         <p:spPr>
           <a:xfrm>
-            <a:off x="594360" y="2258568"/>
-            <a:ext cx="11002975" cy="685800"/>
-          </a:xfrm>
-          <a:prstGeom prst="rect">
-            <a:avLst/>
-          </a:prstGeom>
-          <a:noFill/>
-        </p:spPr>
-        <p:txBody>
-          <a:bodyPr wrap="square">
-            <a:spAutoFit/>
-          </a:bodyPr>
-          <a:lstStyle/>
-          <a:p>
-            <a:pPr algn="ctr"/>
-            <a:r>
-              <a:rPr sz="4400" b="1" i="0">
+            <a:off x="640080" y="2052828"/>
+            <a:ext cx="10911535" cy="731520"/>
+          </a:xfrm>
+          <a:prstGeom prst="rect">
+            <a:avLst/>
+          </a:prstGeom>
+          <a:noFill/>
+        </p:spPr>
+        <p:txBody>
+          <a:bodyPr wrap="square">
+            <a:spAutoFit/>
+          </a:bodyPr>
+          <a:lstStyle/>
+          <a:p>
+            <a:pPr algn="ctr"/>
+            <a:r>
+              <a:rPr sz="4800" b="1" i="0">
                 <a:solidFill>
                   <a:srgbClr val="FFFFFF"/>
                 </a:solidFill>
@@ -3569,99 +3569,29 @@
         </p:nvSpPr>
         <p:spPr>
           <a:xfrm>
-            <a:off x="594360" y="2980944"/>
-            <a:ext cx="11002975" cy="347472"/>
-          </a:xfrm>
-          <a:prstGeom prst="rect">
-            <a:avLst/>
-          </a:prstGeom>
-          <a:noFill/>
-        </p:spPr>
-        <p:txBody>
-          <a:bodyPr wrap="square">
-            <a:spAutoFit/>
-          </a:bodyPr>
-          <a:lstStyle/>
-          <a:p>
-            <a:pPr algn="ctr"/>
-            <a:r>
-              <a:rPr sz="2200" b="0" i="1">
-                <a:solidFill>
-                  <a:srgbClr val="8C8C8C"/>
-                </a:solidFill>
-                <a:latin typeface="Arial"/>
-              </a:rPr>
-              <a:t/>
-            </a:r>
-          </a:p>
-        </p:txBody>
-      </p:sp>
-      <p:sp>
-        <p:nvSpPr>
-          <p:cNvPr id="4" name="TextBox 3"/>
-          <p:cNvSpPr txBox="1"/>
-          <p:nvPr/>
-        </p:nvSpPr>
-        <p:spPr>
-          <a:xfrm>
-            <a:off x="594360" y="3529584"/>
-            <a:ext cx="11002975" cy="685800"/>
-          </a:xfrm>
-          <a:prstGeom prst="rect">
-            <a:avLst/>
-          </a:prstGeom>
-          <a:noFill/>
-        </p:spPr>
-        <p:txBody>
-          <a:bodyPr wrap="square">
-            <a:spAutoFit/>
-          </a:bodyPr>
-          <a:lstStyle/>
-          <a:p>
-            <a:pPr algn="ctr"/>
-            <a:r>
-              <a:rPr sz="4400" b="1" i="0">
+            <a:off x="640080" y="2985516"/>
+            <a:ext cx="10911535" cy="731520"/>
+          </a:xfrm>
+          <a:prstGeom prst="rect">
+            <a:avLst/>
+          </a:prstGeom>
+          <a:noFill/>
+        </p:spPr>
+        <p:txBody>
+          <a:bodyPr wrap="square">
+            <a:spAutoFit/>
+          </a:bodyPr>
+          <a:lstStyle/>
+          <a:p>
+            <a:pPr algn="ctr"/>
+            <a:r>
+              <a:rPr sz="4800" b="1" i="0">
                 <a:solidFill>
                   <a:srgbClr val="FFFFFF"/>
                 </a:solidFill>
                 <a:latin typeface="Arial"/>
               </a:rPr>
               <a:t>Nos tiraste da morte</a:t>
-            </a:r>
-          </a:p>
-        </p:txBody>
-      </p:sp>
-      <p:sp>
-        <p:nvSpPr>
-          <p:cNvPr id="5" name="TextBox 4"/>
-          <p:cNvSpPr txBox="1"/>
-          <p:nvPr/>
-        </p:nvSpPr>
-        <p:spPr>
-          <a:xfrm>
-            <a:off x="594360" y="4251960"/>
-            <a:ext cx="11002975" cy="347472"/>
-          </a:xfrm>
-          <a:prstGeom prst="rect">
-            <a:avLst/>
-          </a:prstGeom>
-          <a:noFill/>
-        </p:spPr>
-        <p:txBody>
-          <a:bodyPr wrap="square">
-            <a:spAutoFit/>
-          </a:bodyPr>
-          <a:lstStyle/>
-          <a:p>
-            <a:pPr algn="ctr"/>
-            <a:r>
-              <a:rPr sz="2200" b="0" i="1">
-                <a:solidFill>
-                  <a:srgbClr val="8C8C8C"/>
-                </a:solidFill>
-                <a:latin typeface="Arial"/>
-              </a:rPr>
-              <a:t/>
             </a:r>
           </a:p>
         </p:txBody>
@@ -3700,23 +3630,23 @@
         </p:nvSpPr>
         <p:spPr>
           <a:xfrm>
-            <a:off x="594360" y="2258568"/>
-            <a:ext cx="11002975" cy="685800"/>
-          </a:xfrm>
-          <a:prstGeom prst="rect">
-            <a:avLst/>
-          </a:prstGeom>
-          <a:noFill/>
-        </p:spPr>
-        <p:txBody>
-          <a:bodyPr wrap="square">
-            <a:spAutoFit/>
-          </a:bodyPr>
-          <a:lstStyle/>
-          <a:p>
-            <a:pPr algn="ctr"/>
-            <a:r>
-              <a:rPr sz="4266" b="1" i="0">
+            <a:off x="640080" y="2052828"/>
+            <a:ext cx="10911535" cy="731520"/>
+          </a:xfrm>
+          <a:prstGeom prst="rect">
+            <a:avLst/>
+          </a:prstGeom>
+          <a:noFill/>
+        </p:spPr>
+        <p:txBody>
+          <a:bodyPr wrap="square">
+            <a:spAutoFit/>
+          </a:bodyPr>
+          <a:lstStyle/>
+          <a:p>
+            <a:pPr algn="ctr"/>
+            <a:r>
+              <a:rPr sz="4600" b="1" i="0">
                 <a:solidFill>
                   <a:srgbClr val="FFFFFF"/>
                 </a:solidFill>
@@ -3735,99 +3665,29 @@
         </p:nvSpPr>
         <p:spPr>
           <a:xfrm>
-            <a:off x="594360" y="2980944"/>
-            <a:ext cx="11002975" cy="347472"/>
-          </a:xfrm>
-          <a:prstGeom prst="rect">
-            <a:avLst/>
-          </a:prstGeom>
-          <a:noFill/>
-        </p:spPr>
-        <p:txBody>
-          <a:bodyPr wrap="square">
-            <a:spAutoFit/>
-          </a:bodyPr>
-          <a:lstStyle/>
-          <a:p>
-            <a:pPr algn="ctr"/>
-            <a:r>
-              <a:rPr sz="2200" b="0" i="1">
-                <a:solidFill>
-                  <a:srgbClr val="8C8C8C"/>
-                </a:solidFill>
-                <a:latin typeface="Arial"/>
-              </a:rPr>
-              <a:t/>
-            </a:r>
-          </a:p>
-        </p:txBody>
-      </p:sp>
-      <p:sp>
-        <p:nvSpPr>
-          <p:cNvPr id="4" name="TextBox 3"/>
-          <p:cNvSpPr txBox="1"/>
-          <p:nvPr/>
-        </p:nvSpPr>
-        <p:spPr>
-          <a:xfrm>
-            <a:off x="594360" y="3529584"/>
-            <a:ext cx="11002975" cy="685800"/>
-          </a:xfrm>
-          <a:prstGeom prst="rect">
-            <a:avLst/>
-          </a:prstGeom>
-          <a:noFill/>
-        </p:spPr>
-        <p:txBody>
-          <a:bodyPr wrap="square">
-            <a:spAutoFit/>
-          </a:bodyPr>
-          <a:lstStyle/>
-          <a:p>
-            <a:pPr algn="ctr"/>
-            <a:r>
-              <a:rPr sz="4141" b="1" i="0">
+            <a:off x="640080" y="2985516"/>
+            <a:ext cx="10911535" cy="731520"/>
+          </a:xfrm>
+          <a:prstGeom prst="rect">
+            <a:avLst/>
+          </a:prstGeom>
+          <a:noFill/>
+        </p:spPr>
+        <p:txBody>
+          <a:bodyPr wrap="square">
+            <a:spAutoFit/>
+          </a:bodyPr>
+          <a:lstStyle/>
+          <a:p>
+            <a:pPr algn="ctr"/>
+            <a:r>
+              <a:rPr sz="4500" b="1" i="0">
                 <a:solidFill>
                   <a:srgbClr val="FFFFFF"/>
                 </a:solidFill>
                 <a:latin typeface="Arial"/>
               </a:rPr>
               <a:t>Quem, ó Senhor, poderia salvar-se?</a:t>
-            </a:r>
-          </a:p>
-        </p:txBody>
-      </p:sp>
-      <p:sp>
-        <p:nvSpPr>
-          <p:cNvPr id="5" name="TextBox 4"/>
-          <p:cNvSpPr txBox="1"/>
-          <p:nvPr/>
-        </p:nvSpPr>
-        <p:spPr>
-          <a:xfrm>
-            <a:off x="594360" y="4251960"/>
-            <a:ext cx="11002975" cy="347472"/>
-          </a:xfrm>
-          <a:prstGeom prst="rect">
-            <a:avLst/>
-          </a:prstGeom>
-          <a:noFill/>
-        </p:spPr>
-        <p:txBody>
-          <a:bodyPr wrap="square">
-            <a:spAutoFit/>
-          </a:bodyPr>
-          <a:lstStyle/>
-          <a:p>
-            <a:pPr algn="ctr"/>
-            <a:r>
-              <a:rPr sz="2200" b="0" i="1">
-                <a:solidFill>
-                  <a:srgbClr val="8C8C8C"/>
-                </a:solidFill>
-                <a:latin typeface="Arial"/>
-              </a:rPr>
-              <a:t/>
             </a:r>
           </a:p>
         </p:txBody>
@@ -3866,64 +3726,29 @@
         </p:nvSpPr>
         <p:spPr>
           <a:xfrm>
-            <a:off x="594360" y="2894076"/>
-            <a:ext cx="11002975" cy="685800"/>
-          </a:xfrm>
-          <a:prstGeom prst="rect">
-            <a:avLst/>
-          </a:prstGeom>
-          <a:noFill/>
-        </p:spPr>
-        <p:txBody>
-          <a:bodyPr wrap="square">
-            <a:spAutoFit/>
-          </a:bodyPr>
-          <a:lstStyle/>
-          <a:p>
-            <a:pPr algn="ctr"/>
-            <a:r>
-              <a:rPr sz="3911" b="1" i="0">
+            <a:off x="640080" y="2702052"/>
+            <a:ext cx="10911535" cy="731520"/>
+          </a:xfrm>
+          <a:prstGeom prst="rect">
+            <a:avLst/>
+          </a:prstGeom>
+          <a:noFill/>
+        </p:spPr>
+        <p:txBody>
+          <a:bodyPr wrap="square">
+            <a:spAutoFit/>
+          </a:bodyPr>
+          <a:lstStyle/>
+          <a:p>
+            <a:pPr algn="ctr"/>
+            <a:r>
+              <a:rPr sz="4200" b="1" i="0">
                 <a:solidFill>
                   <a:srgbClr val="FFFFFF"/>
                 </a:solidFill>
                 <a:latin typeface="Arial"/>
               </a:rPr>
               <a:t>Quem poderia curar o próprio pecado?</a:t>
-            </a:r>
-          </a:p>
-        </p:txBody>
-      </p:sp>
-      <p:sp>
-        <p:nvSpPr>
-          <p:cNvPr id="3" name="TextBox 2"/>
-          <p:cNvSpPr txBox="1"/>
-          <p:nvPr/>
-        </p:nvSpPr>
-        <p:spPr>
-          <a:xfrm>
-            <a:off x="594360" y="3616452"/>
-            <a:ext cx="11002975" cy="347472"/>
-          </a:xfrm>
-          <a:prstGeom prst="rect">
-            <a:avLst/>
-          </a:prstGeom>
-          <a:noFill/>
-        </p:spPr>
-        <p:txBody>
-          <a:bodyPr wrap="square">
-            <a:spAutoFit/>
-          </a:bodyPr>
-          <a:lstStyle/>
-          <a:p>
-            <a:pPr algn="ctr"/>
-            <a:r>
-              <a:rPr sz="2200" b="0" i="1">
-                <a:solidFill>
-                  <a:srgbClr val="8C8C8C"/>
-                </a:solidFill>
-                <a:latin typeface="Arial"/>
-              </a:rPr>
-              <a:t/>
             </a:r>
           </a:p>
         </p:txBody>
@@ -3962,23 +3787,23 @@
         </p:nvSpPr>
         <p:spPr>
           <a:xfrm>
-            <a:off x="594360" y="2258568"/>
-            <a:ext cx="11002975" cy="685800"/>
-          </a:xfrm>
-          <a:prstGeom prst="rect">
-            <a:avLst/>
-          </a:prstGeom>
-          <a:noFill/>
-        </p:spPr>
-        <p:txBody>
-          <a:bodyPr wrap="square">
-            <a:spAutoFit/>
-          </a:bodyPr>
-          <a:lstStyle/>
-          <a:p>
-            <a:pPr algn="ctr"/>
-            <a:r>
-              <a:rPr sz="4400" b="1" i="0">
+            <a:off x="640080" y="2052828"/>
+            <a:ext cx="10911535" cy="731520"/>
+          </a:xfrm>
+          <a:prstGeom prst="rect">
+            <a:avLst/>
+          </a:prstGeom>
+          <a:noFill/>
+        </p:spPr>
+        <p:txBody>
+          <a:bodyPr wrap="square">
+            <a:spAutoFit/>
+          </a:bodyPr>
+          <a:lstStyle/>
+          <a:p>
+            <a:pPr algn="ctr"/>
+            <a:r>
+              <a:rPr sz="4800" b="1" i="0">
                 <a:solidFill>
                   <a:srgbClr val="FFFFFF"/>
                 </a:solidFill>
@@ -3997,25 +3822,60 @@
         </p:nvSpPr>
         <p:spPr>
           <a:xfrm>
-            <a:off x="594360" y="2980944"/>
-            <a:ext cx="11002975" cy="347472"/>
-          </a:xfrm>
-          <a:prstGeom prst="rect">
-            <a:avLst/>
-          </a:prstGeom>
-          <a:noFill/>
-        </p:spPr>
-        <p:txBody>
-          <a:bodyPr wrap="square">
-            <a:spAutoFit/>
-          </a:bodyPr>
-          <a:lstStyle/>
-          <a:p>
-            <a:pPr algn="ctr"/>
-            <a:r>
-              <a:rPr sz="2200" b="0" i="1">
-                <a:solidFill>
-                  <a:srgbClr val="8C8C8C"/>
+            <a:off x="640080" y="2985516"/>
+            <a:ext cx="10911535" cy="731520"/>
+          </a:xfrm>
+          <a:prstGeom prst="rect">
+            <a:avLst/>
+          </a:prstGeom>
+          <a:noFill/>
+        </p:spPr>
+        <p:txBody>
+          <a:bodyPr wrap="square">
+            <a:spAutoFit/>
+          </a:bodyPr>
+          <a:lstStyle/>
+          <a:p>
+            <a:pPr algn="ctr"/>
+            <a:r>
+              <a:rPr sz="4800" b="1" i="0">
+                <a:solidFill>
+                  <a:srgbClr val="FFFFFF"/>
+                </a:solidFill>
+                <a:latin typeface="Arial"/>
+              </a:rPr>
+              <a:t>Só Tu podes salvar</a:t>
+            </a:r>
+          </a:p>
+        </p:txBody>
+      </p:sp>
+      <p:sp>
+        <p:nvSpPr>
+          <p:cNvPr id="4" name="TextBox 3"/>
+          <p:cNvSpPr txBox="1"/>
+          <p:nvPr/>
+        </p:nvSpPr>
+        <p:spPr>
+          <a:xfrm>
+            <a:off x="640080" y="4128516"/>
+            <a:ext cx="10911535" cy="310896"/>
+          </a:xfrm>
+          <a:prstGeom prst="rect">
+            <a:avLst/>
+          </a:prstGeom>
+          <a:noFill/>
+        </p:spPr>
+        <p:txBody>
+          <a:bodyPr wrap="square">
+            <a:spAutoFit/>
+          </a:bodyPr>
+          <a:lstStyle/>
+          <a:p>
+            <a:pPr algn="ctr"/>
+            <a:r>
+              <a:rPr sz="2000" b="0" i="0">
+                <a:solidFill>
+                  <a:srgbClr val="828282"/>
                 </a:solidFill>
                 <a:latin typeface="Arial"/>
               </a:rPr>
@@ -4026,66 +3886,31 @@
       </p:sp>
       <p:sp>
         <p:nvSpPr>
-          <p:cNvPr id="4" name="TextBox 3"/>
-          <p:cNvSpPr txBox="1"/>
-          <p:nvPr/>
-        </p:nvSpPr>
-        <p:spPr>
-          <a:xfrm>
-            <a:off x="594360" y="3529584"/>
-            <a:ext cx="11002975" cy="685800"/>
-          </a:xfrm>
-          <a:prstGeom prst="rect">
-            <a:avLst/>
-          </a:prstGeom>
-          <a:noFill/>
-        </p:spPr>
-        <p:txBody>
-          <a:bodyPr wrap="square">
-            <a:spAutoFit/>
-          </a:bodyPr>
-          <a:lstStyle/>
-          <a:p>
-            <a:pPr algn="ctr"/>
-            <a:r>
-              <a:rPr sz="4400" b="1" i="0">
-                <a:solidFill>
-                  <a:srgbClr val="FFFFFF"/>
-                </a:solidFill>
-                <a:latin typeface="Arial"/>
-              </a:rPr>
-              <a:t>Só Tu podes salvar</a:t>
-            </a:r>
-          </a:p>
-        </p:txBody>
-      </p:sp>
-      <p:sp>
-        <p:nvSpPr>
           <p:cNvPr id="5" name="TextBox 4"/>
           <p:cNvSpPr txBox="1"/>
           <p:nvPr/>
         </p:nvSpPr>
         <p:spPr>
           <a:xfrm>
-            <a:off x="594360" y="4251960"/>
-            <a:ext cx="11002975" cy="347472"/>
-          </a:xfrm>
-          <a:prstGeom prst="rect">
-            <a:avLst/>
-          </a:prstGeom>
-          <a:noFill/>
-        </p:spPr>
-        <p:txBody>
-          <a:bodyPr wrap="square">
-            <a:spAutoFit/>
-          </a:bodyPr>
-          <a:lstStyle/>
-          <a:p>
-            <a:pPr algn="ctr"/>
-            <a:r>
-              <a:rPr sz="2200" b="0" i="1">
-                <a:solidFill>
-                  <a:srgbClr val="8C8C8C"/>
+            <a:off x="640080" y="4494276"/>
+            <a:ext cx="10911535" cy="310896"/>
+          </a:xfrm>
+          <a:prstGeom prst="rect">
+            <a:avLst/>
+          </a:prstGeom>
+          <a:noFill/>
+        </p:spPr>
+        <p:txBody>
+          <a:bodyPr wrap="square">
+            <a:spAutoFit/>
+          </a:bodyPr>
+          <a:lstStyle/>
+          <a:p>
+            <a:pPr algn="ctr"/>
+            <a:r>
+              <a:rPr sz="2000" b="0" i="0">
+                <a:solidFill>
+                  <a:srgbClr val="828282"/>
                 </a:solidFill>
                 <a:latin typeface="Arial"/>
               </a:rPr>
@@ -4128,23 +3953,23 @@
         </p:nvSpPr>
         <p:spPr>
           <a:xfrm>
-            <a:off x="594360" y="2258568"/>
-            <a:ext cx="11002975" cy="685800"/>
-          </a:xfrm>
-          <a:prstGeom prst="rect">
-            <a:avLst/>
-          </a:prstGeom>
-          <a:noFill/>
-        </p:spPr>
-        <p:txBody>
-          <a:bodyPr wrap="square">
-            <a:spAutoFit/>
-          </a:bodyPr>
-          <a:lstStyle/>
-          <a:p>
-            <a:pPr algn="ctr"/>
-            <a:r>
-              <a:rPr sz="4400" b="1" i="0">
+            <a:off x="640080" y="2052828"/>
+            <a:ext cx="10911535" cy="731520"/>
+          </a:xfrm>
+          <a:prstGeom prst="rect">
+            <a:avLst/>
+          </a:prstGeom>
+          <a:noFill/>
+        </p:spPr>
+        <p:txBody>
+          <a:bodyPr wrap="square">
+            <a:spAutoFit/>
+          </a:bodyPr>
+          <a:lstStyle/>
+          <a:p>
+            <a:pPr algn="ctr"/>
+            <a:r>
+              <a:rPr sz="4800" b="1" i="0">
                 <a:solidFill>
                   <a:srgbClr val="FFFFFF"/>
                 </a:solidFill>
@@ -4163,25 +3988,60 @@
         </p:nvSpPr>
         <p:spPr>
           <a:xfrm>
-            <a:off x="594360" y="2980944"/>
-            <a:ext cx="11002975" cy="347472"/>
-          </a:xfrm>
-          <a:prstGeom prst="rect">
-            <a:avLst/>
-          </a:prstGeom>
-          <a:noFill/>
-        </p:spPr>
-        <p:txBody>
-          <a:bodyPr wrap="square">
-            <a:spAutoFit/>
-          </a:bodyPr>
-          <a:lstStyle/>
-          <a:p>
-            <a:pPr algn="ctr"/>
-            <a:r>
-              <a:rPr sz="2200" b="0" i="1">
-                <a:solidFill>
-                  <a:srgbClr val="8C8C8C"/>
+            <a:off x="640080" y="2985516"/>
+            <a:ext cx="10911535" cy="731520"/>
+          </a:xfrm>
+          <a:prstGeom prst="rect">
+            <a:avLst/>
+          </a:prstGeom>
+          <a:noFill/>
+        </p:spPr>
+        <p:txBody>
+          <a:bodyPr wrap="square">
+            <a:spAutoFit/>
+          </a:bodyPr>
+          <a:lstStyle/>
+          <a:p>
+            <a:pPr algn="ctr"/>
+            <a:r>
+              <a:rPr sz="4800" b="1" i="0">
+                <a:solidFill>
+                  <a:srgbClr val="FFFFFF"/>
+                </a:solidFill>
+                <a:latin typeface="Arial"/>
+              </a:rPr>
+              <a:t>Só Tu podes nos tirar do túmulo</a:t>
+            </a:r>
+          </a:p>
+        </p:txBody>
+      </p:sp>
+      <p:sp>
+        <p:nvSpPr>
+          <p:cNvPr id="4" name="TextBox 3"/>
+          <p:cNvSpPr txBox="1"/>
+          <p:nvPr/>
+        </p:nvSpPr>
+        <p:spPr>
+          <a:xfrm>
+            <a:off x="640080" y="4128516"/>
+            <a:ext cx="10911535" cy="310896"/>
+          </a:xfrm>
+          <a:prstGeom prst="rect">
+            <a:avLst/>
+          </a:prstGeom>
+          <a:noFill/>
+        </p:spPr>
+        <p:txBody>
+          <a:bodyPr wrap="square">
+            <a:spAutoFit/>
+          </a:bodyPr>
+          <a:lstStyle/>
+          <a:p>
+            <a:pPr algn="ctr"/>
+            <a:r>
+              <a:rPr sz="2000" b="0" i="0">
+                <a:solidFill>
+                  <a:srgbClr val="828282"/>
                 </a:solidFill>
                 <a:latin typeface="Arial"/>
               </a:rPr>
@@ -4192,66 +4052,31 @@
       </p:sp>
       <p:sp>
         <p:nvSpPr>
-          <p:cNvPr id="4" name="TextBox 3"/>
-          <p:cNvSpPr txBox="1"/>
-          <p:nvPr/>
-        </p:nvSpPr>
-        <p:spPr>
-          <a:xfrm>
-            <a:off x="594360" y="3529584"/>
-            <a:ext cx="11002975" cy="685800"/>
-          </a:xfrm>
-          <a:prstGeom prst="rect">
-            <a:avLst/>
-          </a:prstGeom>
-          <a:noFill/>
-        </p:spPr>
-        <p:txBody>
-          <a:bodyPr wrap="square">
-            <a:spAutoFit/>
-          </a:bodyPr>
-          <a:lstStyle/>
-          <a:p>
-            <a:pPr algn="ctr"/>
-            <a:r>
-              <a:rPr sz="4400" b="1" i="0">
-                <a:solidFill>
-                  <a:srgbClr val="FFFFFF"/>
-                </a:solidFill>
-                <a:latin typeface="Arial"/>
-              </a:rPr>
-              <a:t>Só Tu podes nos tirar do túmulo</a:t>
-            </a:r>
-          </a:p>
-        </p:txBody>
-      </p:sp>
-      <p:sp>
-        <p:nvSpPr>
           <p:cNvPr id="5" name="TextBox 4"/>
           <p:cNvSpPr txBox="1"/>
           <p:nvPr/>
         </p:nvSpPr>
         <p:spPr>
           <a:xfrm>
-            <a:off x="594360" y="4251960"/>
-            <a:ext cx="11002975" cy="347472"/>
-          </a:xfrm>
-          <a:prstGeom prst="rect">
-            <a:avLst/>
-          </a:prstGeom>
-          <a:noFill/>
-        </p:spPr>
-        <p:txBody>
-          <a:bodyPr wrap="square">
-            <a:spAutoFit/>
-          </a:bodyPr>
-          <a:lstStyle/>
-          <a:p>
-            <a:pPr algn="ctr"/>
-            <a:r>
-              <a:rPr sz="2200" b="0" i="1">
-                <a:solidFill>
-                  <a:srgbClr val="8C8C8C"/>
+            <a:off x="640080" y="4494276"/>
+            <a:ext cx="10911535" cy="310896"/>
+          </a:xfrm>
+          <a:prstGeom prst="rect">
+            <a:avLst/>
+          </a:prstGeom>
+          <a:noFill/>
+        </p:spPr>
+        <p:txBody>
+          <a:bodyPr wrap="square">
+            <a:spAutoFit/>
+          </a:bodyPr>
+          <a:lstStyle/>
+          <a:p>
+            <a:pPr algn="ctr"/>
+            <a:r>
+              <a:rPr sz="2000" b="0" i="0">
+                <a:solidFill>
+                  <a:srgbClr val="828282"/>
                 </a:solidFill>
                 <a:latin typeface="Arial"/>
               </a:rPr>
@@ -4294,23 +4119,23 @@
         </p:nvSpPr>
         <p:spPr>
           <a:xfrm>
-            <a:off x="594360" y="2258568"/>
-            <a:ext cx="11002975" cy="685800"/>
-          </a:xfrm>
-          <a:prstGeom prst="rect">
-            <a:avLst/>
-          </a:prstGeom>
-          <a:noFill/>
-        </p:spPr>
-        <p:txBody>
-          <a:bodyPr wrap="square">
-            <a:spAutoFit/>
-          </a:bodyPr>
-          <a:lstStyle/>
-          <a:p>
-            <a:pPr algn="ctr"/>
-            <a:r>
-              <a:rPr sz="3705" b="1" i="0">
+            <a:off x="640080" y="2052828"/>
+            <a:ext cx="10911535" cy="731520"/>
+          </a:xfrm>
+          <a:prstGeom prst="rect">
+            <a:avLst/>
+          </a:prstGeom>
+          <a:noFill/>
+        </p:spPr>
+        <p:txBody>
+          <a:bodyPr wrap="square">
+            <a:spAutoFit/>
+          </a:bodyPr>
+          <a:lstStyle/>
+          <a:p>
+            <a:pPr algn="ctr"/>
+            <a:r>
+              <a:rPr sz="4000" b="1" i="0">
                 <a:solidFill>
                   <a:srgbClr val="FFFFFF"/>
                 </a:solidFill>
@@ -4329,99 +4154,29 @@
         </p:nvSpPr>
         <p:spPr>
           <a:xfrm>
-            <a:off x="594360" y="2980944"/>
-            <a:ext cx="11002975" cy="347472"/>
-          </a:xfrm>
-          <a:prstGeom prst="rect">
-            <a:avLst/>
-          </a:prstGeom>
-          <a:noFill/>
-        </p:spPr>
-        <p:txBody>
-          <a:bodyPr wrap="square">
-            <a:spAutoFit/>
-          </a:bodyPr>
-          <a:lstStyle/>
-          <a:p>
-            <a:pPr algn="ctr"/>
-            <a:r>
-              <a:rPr sz="2200" b="0" i="1">
-                <a:solidFill>
-                  <a:srgbClr val="8C8C8C"/>
-                </a:solidFill>
-                <a:latin typeface="Arial"/>
-              </a:rPr>
-              <a:t/>
-            </a:r>
-          </a:p>
-        </p:txBody>
-      </p:sp>
-      <p:sp>
-        <p:nvSpPr>
-          <p:cNvPr id="4" name="TextBox 3"/>
-          <p:cNvSpPr txBox="1"/>
-          <p:nvPr/>
-        </p:nvSpPr>
-        <p:spPr>
-          <a:xfrm>
-            <a:off x="594360" y="3529584"/>
-            <a:ext cx="11002975" cy="685800"/>
-          </a:xfrm>
-          <a:prstGeom prst="rect">
-            <a:avLst/>
-          </a:prstGeom>
-          <a:noFill/>
-        </p:spPr>
-        <p:txBody>
-          <a:bodyPr wrap="square">
-            <a:spAutoFit/>
-          </a:bodyPr>
-          <a:lstStyle/>
-          <a:p>
-            <a:pPr algn="ctr"/>
-            <a:r>
-              <a:rPr sz="3911" b="1" i="0">
+            <a:off x="640080" y="2985516"/>
+            <a:ext cx="10911535" cy="731520"/>
+          </a:xfrm>
+          <a:prstGeom prst="rect">
+            <a:avLst/>
+          </a:prstGeom>
+          <a:noFill/>
+        </p:spPr>
+        <p:txBody>
+          <a:bodyPr wrap="square">
+            <a:spAutoFit/>
+          </a:bodyPr>
+          <a:lstStyle/>
+          <a:p>
+            <a:pPr algn="ctr"/>
+            <a:r>
+              <a:rPr sz="4200" b="1" i="0">
                 <a:solidFill>
                   <a:srgbClr val="FFFFFF"/>
                 </a:solidFill>
                 <a:latin typeface="Arial"/>
               </a:rPr>
               <a:t>Mas o Teu amor é ainda mais profundo</a:t>
-            </a:r>
-          </a:p>
-        </p:txBody>
-      </p:sp>
-      <p:sp>
-        <p:nvSpPr>
-          <p:cNvPr id="5" name="TextBox 4"/>
-          <p:cNvSpPr txBox="1"/>
-          <p:nvPr/>
-        </p:nvSpPr>
-        <p:spPr>
-          <a:xfrm>
-            <a:off x="594360" y="4251960"/>
-            <a:ext cx="11002975" cy="347472"/>
-          </a:xfrm>
-          <a:prstGeom prst="rect">
-            <a:avLst/>
-          </a:prstGeom>
-          <a:noFill/>
-        </p:spPr>
-        <p:txBody>
-          <a:bodyPr wrap="square">
-            <a:spAutoFit/>
-          </a:bodyPr>
-          <a:lstStyle/>
-          <a:p>
-            <a:pPr algn="ctr"/>
-            <a:r>
-              <a:rPr sz="2200" b="0" i="1">
-                <a:solidFill>
-                  <a:srgbClr val="8C8C8C"/>
-                </a:solidFill>
-                <a:latin typeface="Arial"/>
-              </a:rPr>
-              <a:t/>
             </a:r>
           </a:p>
         </p:txBody>
@@ -4460,23 +4215,23 @@
         </p:nvSpPr>
         <p:spPr>
           <a:xfrm>
-            <a:off x="594360" y="2258568"/>
-            <a:ext cx="11002975" cy="685800"/>
-          </a:xfrm>
-          <a:prstGeom prst="rect">
-            <a:avLst/>
-          </a:prstGeom>
-          <a:noFill/>
-        </p:spPr>
-        <p:txBody>
-          <a:bodyPr wrap="square">
-            <a:spAutoFit/>
-          </a:bodyPr>
-          <a:lstStyle/>
-          <a:p>
-            <a:pPr algn="ctr"/>
-            <a:r>
-              <a:rPr sz="4400" b="1" i="0">
+            <a:off x="640080" y="2052828"/>
+            <a:ext cx="10911535" cy="731520"/>
+          </a:xfrm>
+          <a:prstGeom prst="rect">
+            <a:avLst/>
+          </a:prstGeom>
+          <a:noFill/>
+        </p:spPr>
+        <p:txBody>
+          <a:bodyPr wrap="square">
+            <a:spAutoFit/>
+          </a:bodyPr>
+          <a:lstStyle/>
+          <a:p>
+            <a:pPr algn="ctr"/>
+            <a:r>
+              <a:rPr sz="4800" b="1" i="0">
                 <a:solidFill>
                   <a:srgbClr val="FFFFFF"/>
                 </a:solidFill>
@@ -4495,99 +4250,29 @@
         </p:nvSpPr>
         <p:spPr>
           <a:xfrm>
-            <a:off x="594360" y="2980944"/>
-            <a:ext cx="11002975" cy="347472"/>
-          </a:xfrm>
-          <a:prstGeom prst="rect">
-            <a:avLst/>
-          </a:prstGeom>
-          <a:noFill/>
-        </p:spPr>
-        <p:txBody>
-          <a:bodyPr wrap="square">
-            <a:spAutoFit/>
-          </a:bodyPr>
-          <a:lstStyle/>
-          <a:p>
-            <a:pPr algn="ctr"/>
-            <a:r>
-              <a:rPr sz="2200" b="0" i="1">
-                <a:solidFill>
-                  <a:srgbClr val="8C8C8C"/>
-                </a:solidFill>
-                <a:latin typeface="Arial"/>
-              </a:rPr>
-              <a:t/>
-            </a:r>
-          </a:p>
-        </p:txBody>
-      </p:sp>
-      <p:sp>
-        <p:nvSpPr>
-          <p:cNvPr id="4" name="TextBox 3"/>
-          <p:cNvSpPr txBox="1"/>
-          <p:nvPr/>
-        </p:nvSpPr>
-        <p:spPr>
-          <a:xfrm>
-            <a:off x="594360" y="3529584"/>
-            <a:ext cx="11002975" cy="685800"/>
-          </a:xfrm>
-          <a:prstGeom prst="rect">
-            <a:avLst/>
-          </a:prstGeom>
-          <a:noFill/>
-        </p:spPr>
-        <p:txBody>
-          <a:bodyPr wrap="square">
-            <a:spAutoFit/>
-          </a:bodyPr>
-          <a:lstStyle/>
-          <a:p>
-            <a:pPr algn="ctr"/>
-            <a:r>
-              <a:rPr sz="4400" b="1" i="0">
+            <a:off x="640080" y="2985516"/>
+            <a:ext cx="10911535" cy="731520"/>
+          </a:xfrm>
+          <a:prstGeom prst="rect">
+            <a:avLst/>
+          </a:prstGeom>
+          <a:noFill/>
+        </p:spPr>
+        <p:txBody>
+          <a:bodyPr wrap="square">
+            <a:spAutoFit/>
+          </a:bodyPr>
+          <a:lstStyle/>
+          <a:p>
+            <a:pPr algn="ctr"/>
+            <a:r>
+              <a:rPr sz="4800" b="1" i="0">
                 <a:solidFill>
                   <a:srgbClr val="FFFFFF"/>
                 </a:solidFill>
                 <a:latin typeface="Arial"/>
               </a:rPr>
               <a:t>Só Tu podes resgatar</a:t>
-            </a:r>
-          </a:p>
-        </p:txBody>
-      </p:sp>
-      <p:sp>
-        <p:nvSpPr>
-          <p:cNvPr id="5" name="TextBox 4"/>
-          <p:cNvSpPr txBox="1"/>
-          <p:nvPr/>
-        </p:nvSpPr>
-        <p:spPr>
-          <a:xfrm>
-            <a:off x="594360" y="4251960"/>
-            <a:ext cx="11002975" cy="347472"/>
-          </a:xfrm>
-          <a:prstGeom prst="rect">
-            <a:avLst/>
-          </a:prstGeom>
-          <a:noFill/>
-        </p:spPr>
-        <p:txBody>
-          <a:bodyPr wrap="square">
-            <a:spAutoFit/>
-          </a:bodyPr>
-          <a:lstStyle/>
-          <a:p>
-            <a:pPr algn="ctr"/>
-            <a:r>
-              <a:rPr sz="2200" b="0" i="1">
-                <a:solidFill>
-                  <a:srgbClr val="8C8C8C"/>
-                </a:solidFill>
-                <a:latin typeface="Arial"/>
-              </a:rPr>
-              <a:t/>
             </a:r>
           </a:p>
         </p:txBody>
@@ -4626,23 +4311,23 @@
         </p:nvSpPr>
         <p:spPr>
           <a:xfrm>
-            <a:off x="594360" y="2258568"/>
-            <a:ext cx="11002975" cy="685800"/>
-          </a:xfrm>
-          <a:prstGeom prst="rect">
-            <a:avLst/>
-          </a:prstGeom>
-          <a:noFill/>
-        </p:spPr>
-        <p:txBody>
-          <a:bodyPr wrap="square">
-            <a:spAutoFit/>
-          </a:bodyPr>
-          <a:lstStyle/>
-          <a:p>
-            <a:pPr algn="ctr"/>
-            <a:r>
-              <a:rPr sz="4400" b="1" i="0">
+            <a:off x="640080" y="2052828"/>
+            <a:ext cx="10911535" cy="731520"/>
+          </a:xfrm>
+          <a:prstGeom prst="rect">
+            <a:avLst/>
+          </a:prstGeom>
+          <a:noFill/>
+        </p:spPr>
+        <p:txBody>
+          <a:bodyPr wrap="square">
+            <a:spAutoFit/>
+          </a:bodyPr>
+          <a:lstStyle/>
+          <a:p>
+            <a:pPr algn="ctr"/>
+            <a:r>
+              <a:rPr sz="4800" b="1" i="0">
                 <a:solidFill>
                   <a:srgbClr val="FFFFFF"/>
                 </a:solidFill>
@@ -4661,99 +4346,29 @@
         </p:nvSpPr>
         <p:spPr>
           <a:xfrm>
-            <a:off x="594360" y="2980944"/>
-            <a:ext cx="11002975" cy="347472"/>
-          </a:xfrm>
-          <a:prstGeom prst="rect">
-            <a:avLst/>
-          </a:prstGeom>
-          <a:noFill/>
-        </p:spPr>
-        <p:txBody>
-          <a:bodyPr wrap="square">
-            <a:spAutoFit/>
-          </a:bodyPr>
-          <a:lstStyle/>
-          <a:p>
-            <a:pPr algn="ctr"/>
-            <a:r>
-              <a:rPr sz="2200" b="0" i="1">
-                <a:solidFill>
-                  <a:srgbClr val="8C8C8C"/>
-                </a:solidFill>
-                <a:latin typeface="Arial"/>
-              </a:rPr>
-              <a:t/>
-            </a:r>
-          </a:p>
-        </p:txBody>
-      </p:sp>
-      <p:sp>
-        <p:nvSpPr>
-          <p:cNvPr id="4" name="TextBox 3"/>
-          <p:cNvSpPr txBox="1"/>
-          <p:nvPr/>
-        </p:nvSpPr>
-        <p:spPr>
-          <a:xfrm>
-            <a:off x="594360" y="3529584"/>
-            <a:ext cx="11002975" cy="685800"/>
-          </a:xfrm>
-          <a:prstGeom prst="rect">
-            <a:avLst/>
-          </a:prstGeom>
-          <a:noFill/>
-        </p:spPr>
-        <p:txBody>
-          <a:bodyPr wrap="square">
-            <a:spAutoFit/>
-          </a:bodyPr>
-          <a:lstStyle/>
-          <a:p>
-            <a:pPr algn="ctr"/>
-            <a:r>
-              <a:rPr sz="4400" b="1" i="0">
+            <a:off x="640080" y="2985516"/>
+            <a:ext cx="10911535" cy="731520"/>
+          </a:xfrm>
+          <a:prstGeom prst="rect">
+            <a:avLst/>
+          </a:prstGeom>
+          <a:noFill/>
+        </p:spPr>
+        <p:txBody>
+          <a:bodyPr wrap="square">
+            <a:spAutoFit/>
+          </a:bodyPr>
+          <a:lstStyle/>
+          <a:p>
+            <a:pPr algn="ctr"/>
+            <a:r>
+              <a:rPr sz="4800" b="1" i="0">
                 <a:solidFill>
                   <a:srgbClr val="FFFFFF"/>
                 </a:solidFill>
                 <a:latin typeface="Arial"/>
               </a:rPr>
               <a:t>Tu desceste até nós</a:t>
-            </a:r>
-          </a:p>
-        </p:txBody>
-      </p:sp>
-      <p:sp>
-        <p:nvSpPr>
-          <p:cNvPr id="5" name="TextBox 4"/>
-          <p:cNvSpPr txBox="1"/>
-          <p:nvPr/>
-        </p:nvSpPr>
-        <p:spPr>
-          <a:xfrm>
-            <a:off x="594360" y="4251960"/>
-            <a:ext cx="11002975" cy="347472"/>
-          </a:xfrm>
-          <a:prstGeom prst="rect">
-            <a:avLst/>
-          </a:prstGeom>
-          <a:noFill/>
-        </p:spPr>
-        <p:txBody>
-          <a:bodyPr wrap="square">
-            <a:spAutoFit/>
-          </a:bodyPr>
-          <a:lstStyle/>
-          <a:p>
-            <a:pPr algn="ctr"/>
-            <a:r>
-              <a:rPr sz="2200" b="0" i="1">
-                <a:solidFill>
-                  <a:srgbClr val="8C8C8C"/>
-                </a:solidFill>
-                <a:latin typeface="Arial"/>
-              </a:rPr>
-              <a:t/>
             </a:r>
           </a:p>
         </p:txBody>
@@ -4792,23 +4407,23 @@
         </p:nvSpPr>
         <p:spPr>
           <a:xfrm>
-            <a:off x="594360" y="2258568"/>
-            <a:ext cx="11002975" cy="685800"/>
-          </a:xfrm>
-          <a:prstGeom prst="rect">
-            <a:avLst/>
-          </a:prstGeom>
-          <a:noFill/>
-        </p:spPr>
-        <p:txBody>
-          <a:bodyPr wrap="square">
-            <a:spAutoFit/>
-          </a:bodyPr>
-          <a:lstStyle/>
-          <a:p>
-            <a:pPr algn="ctr"/>
-            <a:r>
-              <a:rPr sz="4400" b="1" i="0">
+            <a:off x="640080" y="2052828"/>
+            <a:ext cx="10911535" cy="731520"/>
+          </a:xfrm>
+          <a:prstGeom prst="rect">
+            <a:avLst/>
+          </a:prstGeom>
+          <a:noFill/>
+        </p:spPr>
+        <p:txBody>
+          <a:bodyPr wrap="square">
+            <a:spAutoFit/>
+          </a:bodyPr>
+          <a:lstStyle/>
+          <a:p>
+            <a:pPr algn="ctr"/>
+            <a:r>
+              <a:rPr sz="4800" b="1" i="0">
                 <a:solidFill>
                   <a:srgbClr val="FFFFFF"/>
                 </a:solidFill>
@@ -4827,99 +4442,29 @@
         </p:nvSpPr>
         <p:spPr>
           <a:xfrm>
-            <a:off x="594360" y="2980944"/>
-            <a:ext cx="11002975" cy="347472"/>
-          </a:xfrm>
-          <a:prstGeom prst="rect">
-            <a:avLst/>
-          </a:prstGeom>
-          <a:noFill/>
-        </p:spPr>
-        <p:txBody>
-          <a:bodyPr wrap="square">
-            <a:spAutoFit/>
-          </a:bodyPr>
-          <a:lstStyle/>
-          <a:p>
-            <a:pPr algn="ctr"/>
-            <a:r>
-              <a:rPr sz="2200" b="0" i="1">
-                <a:solidFill>
-                  <a:srgbClr val="8C8C8C"/>
-                </a:solidFill>
-                <a:latin typeface="Arial"/>
-              </a:rPr>
-              <a:t/>
-            </a:r>
-          </a:p>
-        </p:txBody>
-      </p:sp>
-      <p:sp>
-        <p:nvSpPr>
-          <p:cNvPr id="4" name="TextBox 3"/>
-          <p:cNvSpPr txBox="1"/>
-          <p:nvPr/>
-        </p:nvSpPr>
-        <p:spPr>
-          <a:xfrm>
-            <a:off x="594360" y="3529584"/>
-            <a:ext cx="11002975" cy="685800"/>
-          </a:xfrm>
-          <a:prstGeom prst="rect">
-            <a:avLst/>
-          </a:prstGeom>
-          <a:noFill/>
-        </p:spPr>
-        <p:txBody>
-          <a:bodyPr wrap="square">
-            <a:spAutoFit/>
-          </a:bodyPr>
-          <a:lstStyle/>
-          <a:p>
-            <a:pPr algn="ctr"/>
-            <a:r>
-              <a:rPr sz="4266" b="1" i="0">
+            <a:off x="640080" y="2985516"/>
+            <a:ext cx="10911535" cy="731520"/>
+          </a:xfrm>
+          <a:prstGeom prst="rect">
+            <a:avLst/>
+          </a:prstGeom>
+          <a:noFill/>
+        </p:spPr>
+        <p:txBody>
+          <a:bodyPr wrap="square">
+            <a:spAutoFit/>
+          </a:bodyPr>
+          <a:lstStyle/>
+          <a:p>
+            <a:pPr algn="ctr"/>
+            <a:r>
+              <a:rPr sz="4600" b="1" i="0">
                 <a:solidFill>
                   <a:srgbClr val="FFFFFF"/>
                 </a:solidFill>
                 <a:latin typeface="Arial"/>
               </a:rPr>
               <a:t>A Ti somente pertence todo louvor</a:t>
-            </a:r>
-          </a:p>
-        </p:txBody>
-      </p:sp>
-      <p:sp>
-        <p:nvSpPr>
-          <p:cNvPr id="5" name="TextBox 4"/>
-          <p:cNvSpPr txBox="1"/>
-          <p:nvPr/>
-        </p:nvSpPr>
-        <p:spPr>
-          <a:xfrm>
-            <a:off x="594360" y="4251960"/>
-            <a:ext cx="11002975" cy="347472"/>
-          </a:xfrm>
-          <a:prstGeom prst="rect">
-            <a:avLst/>
-          </a:prstGeom>
-          <a:noFill/>
-        </p:spPr>
-        <p:txBody>
-          <a:bodyPr wrap="square">
-            <a:spAutoFit/>
-          </a:bodyPr>
-          <a:lstStyle/>
-          <a:p>
-            <a:pPr algn="ctr"/>
-            <a:r>
-              <a:rPr sz="2200" b="0" i="1">
-                <a:solidFill>
-                  <a:srgbClr val="8C8C8C"/>
-                </a:solidFill>
-                <a:latin typeface="Arial"/>
-              </a:rPr>
-              <a:t/>
             </a:r>
           </a:p>
         </p:txBody>
@@ -4958,23 +4503,23 @@
         </p:nvSpPr>
         <p:spPr>
           <a:xfrm>
-            <a:off x="594360" y="2258568"/>
-            <a:ext cx="11002975" cy="685800"/>
-          </a:xfrm>
-          <a:prstGeom prst="rect">
-            <a:avLst/>
-          </a:prstGeom>
-          <a:noFill/>
-        </p:spPr>
-        <p:txBody>
-          <a:bodyPr wrap="square">
-            <a:spAutoFit/>
-          </a:bodyPr>
-          <a:lstStyle/>
-          <a:p>
-            <a:pPr algn="ctr"/>
-            <a:r>
-              <a:rPr sz="4400" b="1" i="0">
+            <a:off x="640080" y="2052828"/>
+            <a:ext cx="10911535" cy="731520"/>
+          </a:xfrm>
+          <a:prstGeom prst="rect">
+            <a:avLst/>
+          </a:prstGeom>
+          <a:noFill/>
+        </p:spPr>
+        <p:txBody>
+          <a:bodyPr wrap="square">
+            <a:spAutoFit/>
+          </a:bodyPr>
+          <a:lstStyle/>
+          <a:p>
+            <a:pPr algn="ctr"/>
+            <a:r>
+              <a:rPr sz="4800" b="1" i="0">
                 <a:solidFill>
                   <a:srgbClr val="FFFFFF"/>
                 </a:solidFill>
@@ -4993,25 +4538,60 @@
         </p:nvSpPr>
         <p:spPr>
           <a:xfrm>
-            <a:off x="594360" y="2980944"/>
-            <a:ext cx="11002975" cy="347472"/>
-          </a:xfrm>
-          <a:prstGeom prst="rect">
-            <a:avLst/>
-          </a:prstGeom>
-          <a:noFill/>
-        </p:spPr>
-        <p:txBody>
-          <a:bodyPr wrap="square">
-            <a:spAutoFit/>
-          </a:bodyPr>
-          <a:lstStyle/>
-          <a:p>
-            <a:pPr algn="ctr"/>
-            <a:r>
-              <a:rPr sz="2200" b="0" i="1">
-                <a:solidFill>
-                  <a:srgbClr val="8C8C8C"/>
+            <a:off x="640080" y="2985516"/>
+            <a:ext cx="10911535" cy="731520"/>
+          </a:xfrm>
+          <a:prstGeom prst="rect">
+            <a:avLst/>
+          </a:prstGeom>
+          <a:noFill/>
+        </p:spPr>
+        <p:txBody>
+          <a:bodyPr wrap="square">
+            <a:spAutoFit/>
+          </a:bodyPr>
+          <a:lstStyle/>
+          <a:p>
+            <a:pPr algn="ctr"/>
+            <a:r>
+              <a:rPr sz="4800" b="1" i="0">
+                <a:solidFill>
+                  <a:srgbClr val="FFFFFF"/>
+                </a:solidFill>
+                <a:latin typeface="Arial"/>
+              </a:rPr>
+              <a:t>Só Tu podes nos tirar do túmulo</a:t>
+            </a:r>
+          </a:p>
+        </p:txBody>
+      </p:sp>
+      <p:sp>
+        <p:nvSpPr>
+          <p:cNvPr id="4" name="TextBox 3"/>
+          <p:cNvSpPr txBox="1"/>
+          <p:nvPr/>
+        </p:nvSpPr>
+        <p:spPr>
+          <a:xfrm>
+            <a:off x="640080" y="4128516"/>
+            <a:ext cx="10911535" cy="310896"/>
+          </a:xfrm>
+          <a:prstGeom prst="rect">
+            <a:avLst/>
+          </a:prstGeom>
+          <a:noFill/>
+        </p:spPr>
+        <p:txBody>
+          <a:bodyPr wrap="square">
+            <a:spAutoFit/>
+          </a:bodyPr>
+          <a:lstStyle/>
+          <a:p>
+            <a:pPr algn="ctr"/>
+            <a:r>
+              <a:rPr sz="2000" b="0" i="0">
+                <a:solidFill>
+                  <a:srgbClr val="828282"/>
                 </a:solidFill>
                 <a:latin typeface="Arial"/>
               </a:rPr>
@@ -5022,66 +4602,31 @@
       </p:sp>
       <p:sp>
         <p:nvSpPr>
-          <p:cNvPr id="4" name="TextBox 3"/>
-          <p:cNvSpPr txBox="1"/>
-          <p:nvPr/>
-        </p:nvSpPr>
-        <p:spPr>
-          <a:xfrm>
-            <a:off x="594360" y="3529584"/>
-            <a:ext cx="11002975" cy="685800"/>
-          </a:xfrm>
-          <a:prstGeom prst="rect">
-            <a:avLst/>
-          </a:prstGeom>
-          <a:noFill/>
-        </p:spPr>
-        <p:txBody>
-          <a:bodyPr wrap="square">
-            <a:spAutoFit/>
-          </a:bodyPr>
-          <a:lstStyle/>
-          <a:p>
-            <a:pPr algn="ctr"/>
-            <a:r>
-              <a:rPr sz="4400" b="1" i="0">
-                <a:solidFill>
-                  <a:srgbClr val="FFFFFF"/>
-                </a:solidFill>
-                <a:latin typeface="Arial"/>
-              </a:rPr>
-              <a:t>Só Tu podes nos tirar do túmulo</a:t>
-            </a:r>
-          </a:p>
-        </p:txBody>
-      </p:sp>
-      <p:sp>
-        <p:nvSpPr>
           <p:cNvPr id="5" name="TextBox 4"/>
           <p:cNvSpPr txBox="1"/>
           <p:nvPr/>
         </p:nvSpPr>
         <p:spPr>
           <a:xfrm>
-            <a:off x="594360" y="4251960"/>
-            <a:ext cx="11002975" cy="347472"/>
-          </a:xfrm>
-          <a:prstGeom prst="rect">
-            <a:avLst/>
-          </a:prstGeom>
-          <a:noFill/>
-        </p:spPr>
-        <p:txBody>
-          <a:bodyPr wrap="square">
-            <a:spAutoFit/>
-          </a:bodyPr>
-          <a:lstStyle/>
-          <a:p>
-            <a:pPr algn="ctr"/>
-            <a:r>
-              <a:rPr sz="2200" b="0" i="1">
-                <a:solidFill>
-                  <a:srgbClr val="8C8C8C"/>
+            <a:off x="640080" y="4494276"/>
+            <a:ext cx="10911535" cy="310896"/>
+          </a:xfrm>
+          <a:prstGeom prst="rect">
+            <a:avLst/>
+          </a:prstGeom>
+          <a:noFill/>
+        </p:spPr>
+        <p:txBody>
+          <a:bodyPr wrap="square">
+            <a:spAutoFit/>
+          </a:bodyPr>
+          <a:lstStyle/>
+          <a:p>
+            <a:pPr algn="ctr"/>
+            <a:r>
+              <a:rPr sz="2000" b="0" i="0">
+                <a:solidFill>
+                  <a:srgbClr val="828282"/>
                 </a:solidFill>
                 <a:latin typeface="Arial"/>
               </a:rPr>
@@ -5124,23 +4669,23 @@
         </p:nvSpPr>
         <p:spPr>
           <a:xfrm>
-            <a:off x="594360" y="2258568"/>
-            <a:ext cx="11002975" cy="685800"/>
-          </a:xfrm>
-          <a:prstGeom prst="rect">
-            <a:avLst/>
-          </a:prstGeom>
-          <a:noFill/>
-        </p:spPr>
-        <p:txBody>
-          <a:bodyPr wrap="square">
-            <a:spAutoFit/>
-          </a:bodyPr>
-          <a:lstStyle/>
-          <a:p>
-            <a:pPr algn="ctr"/>
-            <a:r>
-              <a:rPr sz="3911" b="1" i="0">
+            <a:off x="640080" y="2052828"/>
+            <a:ext cx="10911535" cy="731520"/>
+          </a:xfrm>
+          <a:prstGeom prst="rect">
+            <a:avLst/>
+          </a:prstGeom>
+          <a:noFill/>
+        </p:spPr>
+        <p:txBody>
+          <a:bodyPr wrap="square">
+            <a:spAutoFit/>
+          </a:bodyPr>
+          <a:lstStyle/>
+          <a:p>
+            <a:pPr algn="ctr"/>
+            <a:r>
+              <a:rPr sz="4200" b="1" i="0">
                 <a:solidFill>
                   <a:srgbClr val="FFFFFF"/>
                 </a:solidFill>
@@ -5159,99 +4704,29 @@
         </p:nvSpPr>
         <p:spPr>
           <a:xfrm>
-            <a:off x="594360" y="2980944"/>
-            <a:ext cx="11002975" cy="347472"/>
-          </a:xfrm>
-          <a:prstGeom prst="rect">
-            <a:avLst/>
-          </a:prstGeom>
-          <a:noFill/>
-        </p:spPr>
-        <p:txBody>
-          <a:bodyPr wrap="square">
-            <a:spAutoFit/>
-          </a:bodyPr>
-          <a:lstStyle/>
-          <a:p>
-            <a:pPr algn="ctr"/>
-            <a:r>
-              <a:rPr sz="2200" b="0" i="1">
-                <a:solidFill>
-                  <a:srgbClr val="8C8C8C"/>
-                </a:solidFill>
-                <a:latin typeface="Arial"/>
-              </a:rPr>
-              <a:t/>
-            </a:r>
-          </a:p>
-        </p:txBody>
-      </p:sp>
-      <p:sp>
-        <p:nvSpPr>
-          <p:cNvPr id="4" name="TextBox 3"/>
-          <p:cNvSpPr txBox="1"/>
-          <p:nvPr/>
-        </p:nvSpPr>
-        <p:spPr>
-          <a:xfrm>
-            <a:off x="594360" y="3529584"/>
-            <a:ext cx="11002975" cy="685800"/>
-          </a:xfrm>
-          <a:prstGeom prst="rect">
-            <a:avLst/>
-          </a:prstGeom>
-          <a:noFill/>
-        </p:spPr>
-        <p:txBody>
-          <a:bodyPr wrap="square">
-            <a:spAutoFit/>
-          </a:bodyPr>
-          <a:lstStyle/>
-          <a:p>
-            <a:pPr algn="ctr"/>
-            <a:r>
-              <a:rPr sz="4400" b="1" i="0">
+            <a:off x="640080" y="2985516"/>
+            <a:ext cx="10911535" cy="731520"/>
+          </a:xfrm>
+          <a:prstGeom prst="rect">
+            <a:avLst/>
+          </a:prstGeom>
+          <a:noFill/>
+        </p:spPr>
+        <p:txBody>
+          <a:bodyPr wrap="square">
+            <a:spAutoFit/>
+          </a:bodyPr>
+          <a:lstStyle/>
+          <a:p>
+            <a:pPr algn="ctr"/>
+            <a:r>
+              <a:rPr sz="4800" b="1" i="0">
                 <a:solidFill>
                   <a:srgbClr val="FFFFFF"/>
                 </a:solidFill>
                 <a:latin typeface="Arial"/>
               </a:rPr>
               <a:t>Cantamos da libertação</a:t>
-            </a:r>
-          </a:p>
-        </p:txBody>
-      </p:sp>
-      <p:sp>
-        <p:nvSpPr>
-          <p:cNvPr id="5" name="TextBox 4"/>
-          <p:cNvSpPr txBox="1"/>
-          <p:nvPr/>
-        </p:nvSpPr>
-        <p:spPr>
-          <a:xfrm>
-            <a:off x="594360" y="4251960"/>
-            <a:ext cx="11002975" cy="347472"/>
-          </a:xfrm>
-          <a:prstGeom prst="rect">
-            <a:avLst/>
-          </a:prstGeom>
-          <a:noFill/>
-        </p:spPr>
-        <p:txBody>
-          <a:bodyPr wrap="square">
-            <a:spAutoFit/>
-          </a:bodyPr>
-          <a:lstStyle/>
-          <a:p>
-            <a:pPr algn="ctr"/>
-            <a:r>
-              <a:rPr sz="2200" b="0" i="1">
-                <a:solidFill>
-                  <a:srgbClr val="8C8C8C"/>
-                </a:solidFill>
-                <a:latin typeface="Arial"/>
-              </a:rPr>
-              <a:t/>
             </a:r>
           </a:p>
         </p:txBody>
@@ -5290,23 +4765,23 @@
         </p:nvSpPr>
         <p:spPr>
           <a:xfrm>
-            <a:off x="594360" y="2258568"/>
-            <a:ext cx="11002975" cy="685800"/>
-          </a:xfrm>
-          <a:prstGeom prst="rect">
-            <a:avLst/>
-          </a:prstGeom>
-          <a:noFill/>
-        </p:spPr>
-        <p:txBody>
-          <a:bodyPr wrap="square">
-            <a:spAutoFit/>
-          </a:bodyPr>
-          <a:lstStyle/>
-          <a:p>
-            <a:pPr algn="ctr"/>
-            <a:r>
-              <a:rPr sz="4400" b="1" i="0">
+            <a:off x="640080" y="2052828"/>
+            <a:ext cx="10911535" cy="731520"/>
+          </a:xfrm>
+          <a:prstGeom prst="rect">
+            <a:avLst/>
+          </a:prstGeom>
+          <a:noFill/>
+        </p:spPr>
+        <p:txBody>
+          <a:bodyPr wrap="square">
+            <a:spAutoFit/>
+          </a:bodyPr>
+          <a:lstStyle/>
+          <a:p>
+            <a:pPr algn="ctr"/>
+            <a:r>
+              <a:rPr sz="4800" b="1" i="0">
                 <a:solidFill>
                   <a:srgbClr val="FFFFFF"/>
                 </a:solidFill>
@@ -5325,99 +4800,29 @@
         </p:nvSpPr>
         <p:spPr>
           <a:xfrm>
-            <a:off x="594360" y="2980944"/>
-            <a:ext cx="11002975" cy="347472"/>
-          </a:xfrm>
-          <a:prstGeom prst="rect">
-            <a:avLst/>
-          </a:prstGeom>
-          <a:noFill/>
-        </p:spPr>
-        <p:txBody>
-          <a:bodyPr wrap="square">
-            <a:spAutoFit/>
-          </a:bodyPr>
-          <a:lstStyle/>
-          <a:p>
-            <a:pPr algn="ctr"/>
-            <a:r>
-              <a:rPr sz="2200" b="0" i="1">
-                <a:solidFill>
-                  <a:srgbClr val="8C8C8C"/>
-                </a:solidFill>
-                <a:latin typeface="Arial"/>
-              </a:rPr>
-              <a:t/>
-            </a:r>
-          </a:p>
-        </p:txBody>
-      </p:sp>
-      <p:sp>
-        <p:nvSpPr>
-          <p:cNvPr id="4" name="TextBox 3"/>
-          <p:cNvSpPr txBox="1"/>
-          <p:nvPr/>
-        </p:nvSpPr>
-        <p:spPr>
-          <a:xfrm>
-            <a:off x="594360" y="3529584"/>
-            <a:ext cx="11002975" cy="685800"/>
-          </a:xfrm>
-          <a:prstGeom prst="rect">
-            <a:avLst/>
-          </a:prstGeom>
-          <a:noFill/>
-        </p:spPr>
-        <p:txBody>
-          <a:bodyPr wrap="square">
-            <a:spAutoFit/>
-          </a:bodyPr>
-          <a:lstStyle/>
-          <a:p>
-            <a:pPr algn="ctr"/>
-            <a:r>
-              <a:rPr sz="4400" b="1" i="0">
+            <a:off x="640080" y="2985516"/>
+            <a:ext cx="10911535" cy="731520"/>
+          </a:xfrm>
+          <a:prstGeom prst="rect">
+            <a:avLst/>
+          </a:prstGeom>
+          <a:noFill/>
+        </p:spPr>
+        <p:txBody>
+          <a:bodyPr wrap="square">
+            <a:spAutoFit/>
+          </a:bodyPr>
+          <a:lstStyle/>
+          <a:p>
+            <a:pPr algn="ctr"/>
+            <a:r>
+              <a:rPr sz="4800" b="1" i="0">
                 <a:solidFill>
                   <a:srgbClr val="FFFFFF"/>
                 </a:solidFill>
                 <a:latin typeface="Arial"/>
               </a:rPr>
               <a:t>Quando a morte nos tinha</a:t>
-            </a:r>
-          </a:p>
-        </p:txBody>
-      </p:sp>
-      <p:sp>
-        <p:nvSpPr>
-          <p:cNvPr id="5" name="TextBox 4"/>
-          <p:cNvSpPr txBox="1"/>
-          <p:nvPr/>
-        </p:nvSpPr>
-        <p:spPr>
-          <a:xfrm>
-            <a:off x="594360" y="4251960"/>
-            <a:ext cx="11002975" cy="347472"/>
-          </a:xfrm>
-          <a:prstGeom prst="rect">
-            <a:avLst/>
-          </a:prstGeom>
-          <a:noFill/>
-        </p:spPr>
-        <p:txBody>
-          <a:bodyPr wrap="square">
-            <a:spAutoFit/>
-          </a:bodyPr>
-          <a:lstStyle/>
-          <a:p>
-            <a:pPr algn="ctr"/>
-            <a:r>
-              <a:rPr sz="2200" b="0" i="1">
-                <a:solidFill>
-                  <a:srgbClr val="8C8C8C"/>
-                </a:solidFill>
-                <a:latin typeface="Arial"/>
-              </a:rPr>
-              <a:t/>
             </a:r>
           </a:p>
         </p:txBody>
@@ -5456,23 +4861,23 @@
         </p:nvSpPr>
         <p:spPr>
           <a:xfrm>
-            <a:off x="594360" y="2258568"/>
-            <a:ext cx="11002975" cy="685800"/>
-          </a:xfrm>
-          <a:prstGeom prst="rect">
-            <a:avLst/>
-          </a:prstGeom>
-          <a:noFill/>
-        </p:spPr>
-        <p:txBody>
-          <a:bodyPr wrap="square">
-            <a:spAutoFit/>
-          </a:bodyPr>
-          <a:lstStyle/>
-          <a:p>
-            <a:pPr algn="ctr"/>
-            <a:r>
-              <a:rPr sz="4400" b="1" i="0">
+            <a:off x="640080" y="2052828"/>
+            <a:ext cx="10911535" cy="731520"/>
+          </a:xfrm>
+          <a:prstGeom prst="rect">
+            <a:avLst/>
+          </a:prstGeom>
+          <a:noFill/>
+        </p:spPr>
+        <p:txBody>
+          <a:bodyPr wrap="square">
+            <a:spAutoFit/>
+          </a:bodyPr>
+          <a:lstStyle/>
+          <a:p>
+            <a:pPr algn="ctr"/>
+            <a:r>
+              <a:rPr sz="4800" b="1" i="0">
                 <a:solidFill>
                   <a:srgbClr val="FFFFFF"/>
                 </a:solidFill>
@@ -5491,99 +4896,29 @@
         </p:nvSpPr>
         <p:spPr>
           <a:xfrm>
-            <a:off x="594360" y="2980944"/>
-            <a:ext cx="11002975" cy="347472"/>
-          </a:xfrm>
-          <a:prstGeom prst="rect">
-            <a:avLst/>
-          </a:prstGeom>
-          <a:noFill/>
-        </p:spPr>
-        <p:txBody>
-          <a:bodyPr wrap="square">
-            <a:spAutoFit/>
-          </a:bodyPr>
-          <a:lstStyle/>
-          <a:p>
-            <a:pPr algn="ctr"/>
-            <a:r>
-              <a:rPr sz="2200" b="0" i="1">
-                <a:solidFill>
-                  <a:srgbClr val="8C8C8C"/>
-                </a:solidFill>
-                <a:latin typeface="Arial"/>
-              </a:rPr>
-              <a:t/>
-            </a:r>
-          </a:p>
-        </p:txBody>
-      </p:sp>
-      <p:sp>
-        <p:nvSpPr>
-          <p:cNvPr id="4" name="TextBox 3"/>
-          <p:cNvSpPr txBox="1"/>
-          <p:nvPr/>
-        </p:nvSpPr>
-        <p:spPr>
-          <a:xfrm>
-            <a:off x="594360" y="3529584"/>
-            <a:ext cx="11002975" cy="685800"/>
-          </a:xfrm>
-          <a:prstGeom prst="rect">
-            <a:avLst/>
-          </a:prstGeom>
-          <a:noFill/>
-        </p:spPr>
-        <p:txBody>
-          <a:bodyPr wrap="square">
-            <a:spAutoFit/>
-          </a:bodyPr>
-          <a:lstStyle/>
-          <a:p>
-            <a:pPr algn="ctr"/>
-            <a:r>
-              <a:rPr sz="4400" b="1" i="0">
+            <a:off x="640080" y="2985516"/>
+            <a:ext cx="10911535" cy="731520"/>
+          </a:xfrm>
+          <a:prstGeom prst="rect">
+            <a:avLst/>
+          </a:prstGeom>
+          <a:noFill/>
+        </p:spPr>
+        <p:txBody>
+          <a:bodyPr wrap="square">
+            <a:spAutoFit/>
+          </a:bodyPr>
+          <a:lstStyle/>
+          <a:p>
+            <a:pPr algn="ctr"/>
+            <a:r>
+              <a:rPr sz="4800" b="1" i="0">
                 <a:solidFill>
                   <a:srgbClr val="FFFFFF"/>
                 </a:solidFill>
                 <a:latin typeface="Arial"/>
               </a:rPr>
               <a:t>Só Tu és Senhor</a:t>
-            </a:r>
-          </a:p>
-        </p:txBody>
-      </p:sp>
-      <p:sp>
-        <p:nvSpPr>
-          <p:cNvPr id="5" name="TextBox 4"/>
-          <p:cNvSpPr txBox="1"/>
-          <p:nvPr/>
-        </p:nvSpPr>
-        <p:spPr>
-          <a:xfrm>
-            <a:off x="594360" y="4251960"/>
-            <a:ext cx="11002975" cy="347472"/>
-          </a:xfrm>
-          <a:prstGeom prst="rect">
-            <a:avLst/>
-          </a:prstGeom>
-          <a:noFill/>
-        </p:spPr>
-        <p:txBody>
-          <a:bodyPr wrap="square">
-            <a:spAutoFit/>
-          </a:bodyPr>
-          <a:lstStyle/>
-          <a:p>
-            <a:pPr algn="ctr"/>
-            <a:r>
-              <a:rPr sz="2200" b="0" i="1">
-                <a:solidFill>
-                  <a:srgbClr val="8C8C8C"/>
-                </a:solidFill>
-                <a:latin typeface="Arial"/>
-              </a:rPr>
-              <a:t/>
             </a:r>
           </a:p>
         </p:txBody>
@@ -5622,23 +4957,23 @@
         </p:nvSpPr>
         <p:spPr>
           <a:xfrm>
-            <a:off x="594360" y="2258568"/>
-            <a:ext cx="11002975" cy="685800"/>
-          </a:xfrm>
-          <a:prstGeom prst="rect">
-            <a:avLst/>
-          </a:prstGeom>
-          <a:noFill/>
-        </p:spPr>
-        <p:txBody>
-          <a:bodyPr wrap="square">
-            <a:spAutoFit/>
-          </a:bodyPr>
-          <a:lstStyle/>
-          <a:p>
-            <a:pPr algn="ctr"/>
-            <a:r>
-              <a:rPr sz="4400" b="1" i="0">
+            <a:off x="640080" y="2052828"/>
+            <a:ext cx="10911535" cy="731520"/>
+          </a:xfrm>
+          <a:prstGeom prst="rect">
+            <a:avLst/>
+          </a:prstGeom>
+          <a:noFill/>
+        </p:spPr>
+        <p:txBody>
+          <a:bodyPr wrap="square">
+            <a:spAutoFit/>
+          </a:bodyPr>
+          <a:lstStyle/>
+          <a:p>
+            <a:pPr algn="ctr"/>
+            <a:r>
+              <a:rPr sz="4800" b="1" i="0">
                 <a:solidFill>
                   <a:srgbClr val="FFFFFF"/>
                 </a:solidFill>
@@ -5657,25 +4992,60 @@
         </p:nvSpPr>
         <p:spPr>
           <a:xfrm>
-            <a:off x="594360" y="2980944"/>
-            <a:ext cx="11002975" cy="347472"/>
-          </a:xfrm>
-          <a:prstGeom prst="rect">
-            <a:avLst/>
-          </a:prstGeom>
-          <a:noFill/>
-        </p:spPr>
-        <p:txBody>
-          <a:bodyPr wrap="square">
-            <a:spAutoFit/>
-          </a:bodyPr>
-          <a:lstStyle/>
-          <a:p>
-            <a:pPr algn="ctr"/>
-            <a:r>
-              <a:rPr sz="2200" b="0" i="1">
-                <a:solidFill>
-                  <a:srgbClr val="8C8C8C"/>
+            <a:off x="640080" y="2985516"/>
+            <a:ext cx="10911535" cy="731520"/>
+          </a:xfrm>
+          <a:prstGeom prst="rect">
+            <a:avLst/>
+          </a:prstGeom>
+          <a:noFill/>
+        </p:spPr>
+        <p:txBody>
+          <a:bodyPr wrap="square">
+            <a:spAutoFit/>
+          </a:bodyPr>
+          <a:lstStyle/>
+          <a:p>
+            <a:pPr algn="ctr"/>
+            <a:r>
+              <a:rPr sz="4800" b="1" i="0">
+                <a:solidFill>
+                  <a:srgbClr val="FFFFFF"/>
+                </a:solidFill>
+                <a:latin typeface="Arial"/>
+              </a:rPr>
+              <a:t>Só Tu podes salvar</a:t>
+            </a:r>
+          </a:p>
+        </p:txBody>
+      </p:sp>
+      <p:sp>
+        <p:nvSpPr>
+          <p:cNvPr id="4" name="TextBox 3"/>
+          <p:cNvSpPr txBox="1"/>
+          <p:nvPr/>
+        </p:nvSpPr>
+        <p:spPr>
+          <a:xfrm>
+            <a:off x="640080" y="4128516"/>
+            <a:ext cx="10911535" cy="310896"/>
+          </a:xfrm>
+          <a:prstGeom prst="rect">
+            <a:avLst/>
+          </a:prstGeom>
+          <a:noFill/>
+        </p:spPr>
+        <p:txBody>
+          <a:bodyPr wrap="square">
+            <a:spAutoFit/>
+          </a:bodyPr>
+          <a:lstStyle/>
+          <a:p>
+            <a:pPr algn="ctr"/>
+            <a:r>
+              <a:rPr sz="2000" b="0" i="0">
+                <a:solidFill>
+                  <a:srgbClr val="828282"/>
                 </a:solidFill>
                 <a:latin typeface="Arial"/>
               </a:rPr>
@@ -5686,66 +5056,31 @@
       </p:sp>
       <p:sp>
         <p:nvSpPr>
-          <p:cNvPr id="4" name="TextBox 3"/>
-          <p:cNvSpPr txBox="1"/>
-          <p:nvPr/>
-        </p:nvSpPr>
-        <p:spPr>
-          <a:xfrm>
-            <a:off x="594360" y="3529584"/>
-            <a:ext cx="11002975" cy="685800"/>
-          </a:xfrm>
-          <a:prstGeom prst="rect">
-            <a:avLst/>
-          </a:prstGeom>
-          <a:noFill/>
-        </p:spPr>
-        <p:txBody>
-          <a:bodyPr wrap="square">
-            <a:spAutoFit/>
-          </a:bodyPr>
-          <a:lstStyle/>
-          <a:p>
-            <a:pPr algn="ctr"/>
-            <a:r>
-              <a:rPr sz="4400" b="1" i="0">
-                <a:solidFill>
-                  <a:srgbClr val="FFFFFF"/>
-                </a:solidFill>
-                <a:latin typeface="Arial"/>
-              </a:rPr>
-              <a:t>Só Tu podes salvar</a:t>
-            </a:r>
-          </a:p>
-        </p:txBody>
-      </p:sp>
-      <p:sp>
-        <p:nvSpPr>
           <p:cNvPr id="5" name="TextBox 4"/>
           <p:cNvSpPr txBox="1"/>
           <p:nvPr/>
         </p:nvSpPr>
         <p:spPr>
           <a:xfrm>
-            <a:off x="594360" y="4251960"/>
-            <a:ext cx="11002975" cy="347472"/>
-          </a:xfrm>
-          <a:prstGeom prst="rect">
-            <a:avLst/>
-          </a:prstGeom>
-          <a:noFill/>
-        </p:spPr>
-        <p:txBody>
-          <a:bodyPr wrap="square">
-            <a:spAutoFit/>
-          </a:bodyPr>
-          <a:lstStyle/>
-          <a:p>
-            <a:pPr algn="ctr"/>
-            <a:r>
-              <a:rPr sz="2200" b="0" i="1">
-                <a:solidFill>
-                  <a:srgbClr val="8C8C8C"/>
+            <a:off x="640080" y="4494276"/>
+            <a:ext cx="10911535" cy="310896"/>
+          </a:xfrm>
+          <a:prstGeom prst="rect">
+            <a:avLst/>
+          </a:prstGeom>
+          <a:noFill/>
+        </p:spPr>
+        <p:txBody>
+          <a:bodyPr wrap="square">
+            <a:spAutoFit/>
+          </a:bodyPr>
+          <a:lstStyle/>
+          <a:p>
+            <a:pPr algn="ctr"/>
+            <a:r>
+              <a:rPr sz="2000" b="0" i="0">
+                <a:solidFill>
+                  <a:srgbClr val="828282"/>
                 </a:solidFill>
                 <a:latin typeface="Arial"/>
               </a:rPr>
@@ -5788,23 +5123,23 @@
         </p:nvSpPr>
         <p:spPr>
           <a:xfrm>
-            <a:off x="594360" y="2258568"/>
-            <a:ext cx="11002975" cy="685800"/>
-          </a:xfrm>
-          <a:prstGeom prst="rect">
-            <a:avLst/>
-          </a:prstGeom>
-          <a:noFill/>
-        </p:spPr>
-        <p:txBody>
-          <a:bodyPr wrap="square">
-            <a:spAutoFit/>
-          </a:bodyPr>
-          <a:lstStyle/>
-          <a:p>
-            <a:pPr algn="ctr"/>
-            <a:r>
-              <a:rPr sz="4400" b="1" i="0">
+            <a:off x="640080" y="2052828"/>
+            <a:ext cx="10911535" cy="731520"/>
+          </a:xfrm>
+          <a:prstGeom prst="rect">
+            <a:avLst/>
+          </a:prstGeom>
+          <a:noFill/>
+        </p:spPr>
+        <p:txBody>
+          <a:bodyPr wrap="square">
+            <a:spAutoFit/>
+          </a:bodyPr>
+          <a:lstStyle/>
+          <a:p>
+            <a:pPr algn="ctr"/>
+            <a:r>
+              <a:rPr sz="4800" b="1" i="0">
                 <a:solidFill>
                   <a:srgbClr val="FFFFFF"/>
                 </a:solidFill>
@@ -5823,25 +5158,60 @@
         </p:nvSpPr>
         <p:spPr>
           <a:xfrm>
-            <a:off x="594360" y="2980944"/>
-            <a:ext cx="11002975" cy="347472"/>
-          </a:xfrm>
-          <a:prstGeom prst="rect">
-            <a:avLst/>
-          </a:prstGeom>
-          <a:noFill/>
-        </p:spPr>
-        <p:txBody>
-          <a:bodyPr wrap="square">
-            <a:spAutoFit/>
-          </a:bodyPr>
-          <a:lstStyle/>
-          <a:p>
-            <a:pPr algn="ctr"/>
-            <a:r>
-              <a:rPr sz="2200" b="0" i="1">
-                <a:solidFill>
-                  <a:srgbClr val="8C8C8C"/>
+            <a:off x="640080" y="2985516"/>
+            <a:ext cx="10911535" cy="731520"/>
+          </a:xfrm>
+          <a:prstGeom prst="rect">
+            <a:avLst/>
+          </a:prstGeom>
+          <a:noFill/>
+        </p:spPr>
+        <p:txBody>
+          <a:bodyPr wrap="square">
+            <a:spAutoFit/>
+          </a:bodyPr>
+          <a:lstStyle/>
+          <a:p>
+            <a:pPr algn="ctr"/>
+            <a:r>
+              <a:rPr sz="4800" b="1" i="0">
+                <a:solidFill>
+                  <a:srgbClr val="FFFFFF"/>
+                </a:solidFill>
+                <a:latin typeface="Arial"/>
+              </a:rPr>
+              <a:t>Só Tu podes nos tirar do túmulo</a:t>
+            </a:r>
+          </a:p>
+        </p:txBody>
+      </p:sp>
+      <p:sp>
+        <p:nvSpPr>
+          <p:cNvPr id="4" name="TextBox 3"/>
+          <p:cNvSpPr txBox="1"/>
+          <p:nvPr/>
+        </p:nvSpPr>
+        <p:spPr>
+          <a:xfrm>
+            <a:off x="640080" y="4128516"/>
+            <a:ext cx="10911535" cy="310896"/>
+          </a:xfrm>
+          <a:prstGeom prst="rect">
+            <a:avLst/>
+          </a:prstGeom>
+          <a:noFill/>
+        </p:spPr>
+        <p:txBody>
+          <a:bodyPr wrap="square">
+            <a:spAutoFit/>
+          </a:bodyPr>
+          <a:lstStyle/>
+          <a:p>
+            <a:pPr algn="ctr"/>
+            <a:r>
+              <a:rPr sz="2000" b="0" i="0">
+                <a:solidFill>
+                  <a:srgbClr val="828282"/>
                 </a:solidFill>
                 <a:latin typeface="Arial"/>
               </a:rPr>
@@ -5852,66 +5222,31 @@
       </p:sp>
       <p:sp>
         <p:nvSpPr>
-          <p:cNvPr id="4" name="TextBox 3"/>
-          <p:cNvSpPr txBox="1"/>
-          <p:nvPr/>
-        </p:nvSpPr>
-        <p:spPr>
-          <a:xfrm>
-            <a:off x="594360" y="3529584"/>
-            <a:ext cx="11002975" cy="685800"/>
-          </a:xfrm>
-          <a:prstGeom prst="rect">
-            <a:avLst/>
-          </a:prstGeom>
-          <a:noFill/>
-        </p:spPr>
-        <p:txBody>
-          <a:bodyPr wrap="square">
-            <a:spAutoFit/>
-          </a:bodyPr>
-          <a:lstStyle/>
-          <a:p>
-            <a:pPr algn="ctr"/>
-            <a:r>
-              <a:rPr sz="4400" b="1" i="0">
-                <a:solidFill>
-                  <a:srgbClr val="FFFFFF"/>
-                </a:solidFill>
-                <a:latin typeface="Arial"/>
-              </a:rPr>
-              <a:t>Só Tu podes nos tirar do túmulo</a:t>
-            </a:r>
-          </a:p>
-        </p:txBody>
-      </p:sp>
-      <p:sp>
-        <p:nvSpPr>
           <p:cNvPr id="5" name="TextBox 4"/>
           <p:cNvSpPr txBox="1"/>
           <p:nvPr/>
         </p:nvSpPr>
         <p:spPr>
           <a:xfrm>
-            <a:off x="594360" y="4251960"/>
-            <a:ext cx="11002975" cy="347472"/>
-          </a:xfrm>
-          <a:prstGeom prst="rect">
-            <a:avLst/>
-          </a:prstGeom>
-          <a:noFill/>
-        </p:spPr>
-        <p:txBody>
-          <a:bodyPr wrap="square">
-            <a:spAutoFit/>
-          </a:bodyPr>
-          <a:lstStyle/>
-          <a:p>
-            <a:pPr algn="ctr"/>
-            <a:r>
-              <a:rPr sz="2200" b="0" i="1">
-                <a:solidFill>
-                  <a:srgbClr val="8C8C8C"/>
+            <a:off x="640080" y="4494276"/>
+            <a:ext cx="10911535" cy="310896"/>
+          </a:xfrm>
+          <a:prstGeom prst="rect">
+            <a:avLst/>
+          </a:prstGeom>
+          <a:noFill/>
+        </p:spPr>
+        <p:txBody>
+          <a:bodyPr wrap="square">
+            <a:spAutoFit/>
+          </a:bodyPr>
+          <a:lstStyle/>
+          <a:p>
+            <a:pPr algn="ctr"/>
+            <a:r>
+              <a:rPr sz="2000" b="0" i="0">
+                <a:solidFill>
+                  <a:srgbClr val="828282"/>
                 </a:solidFill>
                 <a:latin typeface="Arial"/>
               </a:rPr>
@@ -5954,23 +5289,23 @@
         </p:nvSpPr>
         <p:spPr>
           <a:xfrm>
-            <a:off x="594360" y="2258568"/>
-            <a:ext cx="11002975" cy="685800"/>
-          </a:xfrm>
-          <a:prstGeom prst="rect">
-            <a:avLst/>
-          </a:prstGeom>
-          <a:noFill/>
-        </p:spPr>
-        <p:txBody>
-          <a:bodyPr wrap="square">
-            <a:spAutoFit/>
-          </a:bodyPr>
-          <a:lstStyle/>
-          <a:p>
-            <a:pPr algn="ctr"/>
-            <a:r>
-              <a:rPr sz="3705" b="1" i="0">
+            <a:off x="640080" y="2052828"/>
+            <a:ext cx="10911535" cy="731520"/>
+          </a:xfrm>
+          <a:prstGeom prst="rect">
+            <a:avLst/>
+          </a:prstGeom>
+          <a:noFill/>
+        </p:spPr>
+        <p:txBody>
+          <a:bodyPr wrap="square">
+            <a:spAutoFit/>
+          </a:bodyPr>
+          <a:lstStyle/>
+          <a:p>
+            <a:pPr algn="ctr"/>
+            <a:r>
+              <a:rPr sz="4000" b="1" i="0">
                 <a:solidFill>
                   <a:srgbClr val="FFFFFF"/>
                 </a:solidFill>
@@ -5989,99 +5324,29 @@
         </p:nvSpPr>
         <p:spPr>
           <a:xfrm>
-            <a:off x="594360" y="2980944"/>
-            <a:ext cx="11002975" cy="347472"/>
-          </a:xfrm>
-          <a:prstGeom prst="rect">
-            <a:avLst/>
-          </a:prstGeom>
-          <a:noFill/>
-        </p:spPr>
-        <p:txBody>
-          <a:bodyPr wrap="square">
-            <a:spAutoFit/>
-          </a:bodyPr>
-          <a:lstStyle/>
-          <a:p>
-            <a:pPr algn="ctr"/>
-            <a:r>
-              <a:rPr sz="2200" b="0" i="1">
-                <a:solidFill>
-                  <a:srgbClr val="8C8C8C"/>
-                </a:solidFill>
-                <a:latin typeface="Arial"/>
-              </a:rPr>
-              <a:t/>
-            </a:r>
-          </a:p>
-        </p:txBody>
-      </p:sp>
-      <p:sp>
-        <p:nvSpPr>
-          <p:cNvPr id="4" name="TextBox 3"/>
-          <p:cNvSpPr txBox="1"/>
-          <p:nvPr/>
-        </p:nvSpPr>
-        <p:spPr>
-          <a:xfrm>
-            <a:off x="594360" y="3529584"/>
-            <a:ext cx="11002975" cy="685800"/>
-          </a:xfrm>
-          <a:prstGeom prst="rect">
-            <a:avLst/>
-          </a:prstGeom>
-          <a:noFill/>
-        </p:spPr>
-        <p:txBody>
-          <a:bodyPr wrap="square">
-            <a:spAutoFit/>
-          </a:bodyPr>
-          <a:lstStyle/>
-          <a:p>
-            <a:pPr algn="ctr"/>
-            <a:r>
-              <a:rPr sz="3911" b="1" i="0">
+            <a:off x="640080" y="2985516"/>
+            <a:ext cx="10911535" cy="731520"/>
+          </a:xfrm>
+          <a:prstGeom prst="rect">
+            <a:avLst/>
+          </a:prstGeom>
+          <a:noFill/>
+        </p:spPr>
+        <p:txBody>
+          <a:bodyPr wrap="square">
+            <a:spAutoFit/>
+          </a:bodyPr>
+          <a:lstStyle/>
+          <a:p>
+            <a:pPr algn="ctr"/>
+            <a:r>
+              <a:rPr sz="4200" b="1" i="0">
                 <a:solidFill>
                   <a:srgbClr val="FFFFFF"/>
                 </a:solidFill>
                 <a:latin typeface="Arial"/>
               </a:rPr>
               <a:t>Mas o Teu amor é ainda mais profundo</a:t>
-            </a:r>
-          </a:p>
-        </p:txBody>
-      </p:sp>
-      <p:sp>
-        <p:nvSpPr>
-          <p:cNvPr id="5" name="TextBox 4"/>
-          <p:cNvSpPr txBox="1"/>
-          <p:nvPr/>
-        </p:nvSpPr>
-        <p:spPr>
-          <a:xfrm>
-            <a:off x="594360" y="4251960"/>
-            <a:ext cx="11002975" cy="347472"/>
-          </a:xfrm>
-          <a:prstGeom prst="rect">
-            <a:avLst/>
-          </a:prstGeom>
-          <a:noFill/>
-        </p:spPr>
-        <p:txBody>
-          <a:bodyPr wrap="square">
-            <a:spAutoFit/>
-          </a:bodyPr>
-          <a:lstStyle/>
-          <a:p>
-            <a:pPr algn="ctr"/>
-            <a:r>
-              <a:rPr sz="2200" b="0" i="1">
-                <a:solidFill>
-                  <a:srgbClr val="8C8C8C"/>
-                </a:solidFill>
-                <a:latin typeface="Arial"/>
-              </a:rPr>
-              <a:t/>
             </a:r>
           </a:p>
         </p:txBody>
@@ -6120,23 +5385,23 @@
         </p:nvSpPr>
         <p:spPr>
           <a:xfrm>
-            <a:off x="594360" y="2258568"/>
-            <a:ext cx="11002975" cy="685800"/>
-          </a:xfrm>
-          <a:prstGeom prst="rect">
-            <a:avLst/>
-          </a:prstGeom>
-          <a:noFill/>
-        </p:spPr>
-        <p:txBody>
-          <a:bodyPr wrap="square">
-            <a:spAutoFit/>
-          </a:bodyPr>
-          <a:lstStyle/>
-          <a:p>
-            <a:pPr algn="ctr"/>
-            <a:r>
-              <a:rPr sz="4400" b="1" i="0">
+            <a:off x="640080" y="2052828"/>
+            <a:ext cx="10911535" cy="731520"/>
+          </a:xfrm>
+          <a:prstGeom prst="rect">
+            <a:avLst/>
+          </a:prstGeom>
+          <a:noFill/>
+        </p:spPr>
+        <p:txBody>
+          <a:bodyPr wrap="square">
+            <a:spAutoFit/>
+          </a:bodyPr>
+          <a:lstStyle/>
+          <a:p>
+            <a:pPr algn="ctr"/>
+            <a:r>
+              <a:rPr sz="4800" b="1" i="0">
                 <a:solidFill>
                   <a:srgbClr val="FFFFFF"/>
                 </a:solidFill>
@@ -6155,99 +5420,29 @@
         </p:nvSpPr>
         <p:spPr>
           <a:xfrm>
-            <a:off x="594360" y="2980944"/>
-            <a:ext cx="11002975" cy="347472"/>
-          </a:xfrm>
-          <a:prstGeom prst="rect">
-            <a:avLst/>
-          </a:prstGeom>
-          <a:noFill/>
-        </p:spPr>
-        <p:txBody>
-          <a:bodyPr wrap="square">
-            <a:spAutoFit/>
-          </a:bodyPr>
-          <a:lstStyle/>
-          <a:p>
-            <a:pPr algn="ctr"/>
-            <a:r>
-              <a:rPr sz="2200" b="0" i="1">
-                <a:solidFill>
-                  <a:srgbClr val="8C8C8C"/>
-                </a:solidFill>
-                <a:latin typeface="Arial"/>
-              </a:rPr>
-              <a:t/>
-            </a:r>
-          </a:p>
-        </p:txBody>
-      </p:sp>
-      <p:sp>
-        <p:nvSpPr>
-          <p:cNvPr id="4" name="TextBox 3"/>
-          <p:cNvSpPr txBox="1"/>
-          <p:nvPr/>
-        </p:nvSpPr>
-        <p:spPr>
-          <a:xfrm>
-            <a:off x="594360" y="3529584"/>
-            <a:ext cx="11002975" cy="685800"/>
-          </a:xfrm>
-          <a:prstGeom prst="rect">
-            <a:avLst/>
-          </a:prstGeom>
-          <a:noFill/>
-        </p:spPr>
-        <p:txBody>
-          <a:bodyPr wrap="square">
-            <a:spAutoFit/>
-          </a:bodyPr>
-          <a:lstStyle/>
-          <a:p>
-            <a:pPr algn="ctr"/>
-            <a:r>
-              <a:rPr sz="4400" b="1" i="0">
+            <a:off x="640080" y="2985516"/>
+            <a:ext cx="10911535" cy="731520"/>
+          </a:xfrm>
+          <a:prstGeom prst="rect">
+            <a:avLst/>
+          </a:prstGeom>
+          <a:noFill/>
+        </p:spPr>
+        <p:txBody>
+          <a:bodyPr wrap="square">
+            <a:spAutoFit/>
+          </a:bodyPr>
+          <a:lstStyle/>
+          <a:p>
+            <a:pPr algn="ctr"/>
+            <a:r>
+              <a:rPr sz="4800" b="1" i="0">
                 <a:solidFill>
                   <a:srgbClr val="FFFFFF"/>
                 </a:solidFill>
                 <a:latin typeface="Arial"/>
               </a:rPr>
               <a:t>Só Tu podes resgatar</a:t>
-            </a:r>
-          </a:p>
-        </p:txBody>
-      </p:sp>
-      <p:sp>
-        <p:nvSpPr>
-          <p:cNvPr id="5" name="TextBox 4"/>
-          <p:cNvSpPr txBox="1"/>
-          <p:nvPr/>
-        </p:nvSpPr>
-        <p:spPr>
-          <a:xfrm>
-            <a:off x="594360" y="4251960"/>
-            <a:ext cx="11002975" cy="347472"/>
-          </a:xfrm>
-          <a:prstGeom prst="rect">
-            <a:avLst/>
-          </a:prstGeom>
-          <a:noFill/>
-        </p:spPr>
-        <p:txBody>
-          <a:bodyPr wrap="square">
-            <a:spAutoFit/>
-          </a:bodyPr>
-          <a:lstStyle/>
-          <a:p>
-            <a:pPr algn="ctr"/>
-            <a:r>
-              <a:rPr sz="2200" b="0" i="1">
-                <a:solidFill>
-                  <a:srgbClr val="8C8C8C"/>
-                </a:solidFill>
-                <a:latin typeface="Arial"/>
-              </a:rPr>
-              <a:t/>
             </a:r>
           </a:p>
         </p:txBody>
@@ -6286,23 +5481,23 @@
         </p:nvSpPr>
         <p:spPr>
           <a:xfrm>
-            <a:off x="594360" y="2258568"/>
-            <a:ext cx="11002975" cy="685800"/>
-          </a:xfrm>
-          <a:prstGeom prst="rect">
-            <a:avLst/>
-          </a:prstGeom>
-          <a:noFill/>
-        </p:spPr>
-        <p:txBody>
-          <a:bodyPr wrap="square">
-            <a:spAutoFit/>
-          </a:bodyPr>
-          <a:lstStyle/>
-          <a:p>
-            <a:pPr algn="ctr"/>
-            <a:r>
-              <a:rPr sz="4400" b="1" i="0">
+            <a:off x="640080" y="2052828"/>
+            <a:ext cx="10911535" cy="731520"/>
+          </a:xfrm>
+          <a:prstGeom prst="rect">
+            <a:avLst/>
+          </a:prstGeom>
+          <a:noFill/>
+        </p:spPr>
+        <p:txBody>
+          <a:bodyPr wrap="square">
+            <a:spAutoFit/>
+          </a:bodyPr>
+          <a:lstStyle/>
+          <a:p>
+            <a:pPr algn="ctr"/>
+            <a:r>
+              <a:rPr sz="4800" b="1" i="0">
                 <a:solidFill>
                   <a:srgbClr val="FFFFFF"/>
                 </a:solidFill>
@@ -6321,99 +5516,29 @@
         </p:nvSpPr>
         <p:spPr>
           <a:xfrm>
-            <a:off x="594360" y="2980944"/>
-            <a:ext cx="11002975" cy="347472"/>
-          </a:xfrm>
-          <a:prstGeom prst="rect">
-            <a:avLst/>
-          </a:prstGeom>
-          <a:noFill/>
-        </p:spPr>
-        <p:txBody>
-          <a:bodyPr wrap="square">
-            <a:spAutoFit/>
-          </a:bodyPr>
-          <a:lstStyle/>
-          <a:p>
-            <a:pPr algn="ctr"/>
-            <a:r>
-              <a:rPr sz="2200" b="0" i="1">
-                <a:solidFill>
-                  <a:srgbClr val="8C8C8C"/>
-                </a:solidFill>
-                <a:latin typeface="Arial"/>
-              </a:rPr>
-              <a:t/>
-            </a:r>
-          </a:p>
-        </p:txBody>
-      </p:sp>
-      <p:sp>
-        <p:nvSpPr>
-          <p:cNvPr id="4" name="TextBox 3"/>
-          <p:cNvSpPr txBox="1"/>
-          <p:nvPr/>
-        </p:nvSpPr>
-        <p:spPr>
-          <a:xfrm>
-            <a:off x="594360" y="3529584"/>
-            <a:ext cx="11002975" cy="685800"/>
-          </a:xfrm>
-          <a:prstGeom prst="rect">
-            <a:avLst/>
-          </a:prstGeom>
-          <a:noFill/>
-        </p:spPr>
-        <p:txBody>
-          <a:bodyPr wrap="square">
-            <a:spAutoFit/>
-          </a:bodyPr>
-          <a:lstStyle/>
-          <a:p>
-            <a:pPr algn="ctr"/>
-            <a:r>
-              <a:rPr sz="4400" b="1" i="0">
+            <a:off x="640080" y="2985516"/>
+            <a:ext cx="10911535" cy="731520"/>
+          </a:xfrm>
+          <a:prstGeom prst="rect">
+            <a:avLst/>
+          </a:prstGeom>
+          <a:noFill/>
+        </p:spPr>
+        <p:txBody>
+          <a:bodyPr wrap="square">
+            <a:spAutoFit/>
+          </a:bodyPr>
+          <a:lstStyle/>
+          <a:p>
+            <a:pPr algn="ctr"/>
+            <a:r>
+              <a:rPr sz="4800" b="1" i="0">
                 <a:solidFill>
                   <a:srgbClr val="FFFFFF"/>
                 </a:solidFill>
                 <a:latin typeface="Arial"/>
               </a:rPr>
               <a:t>Tu desceste até nós</a:t>
-            </a:r>
-          </a:p>
-        </p:txBody>
-      </p:sp>
-      <p:sp>
-        <p:nvSpPr>
-          <p:cNvPr id="5" name="TextBox 4"/>
-          <p:cNvSpPr txBox="1"/>
-          <p:nvPr/>
-        </p:nvSpPr>
-        <p:spPr>
-          <a:xfrm>
-            <a:off x="594360" y="4251960"/>
-            <a:ext cx="11002975" cy="347472"/>
-          </a:xfrm>
-          <a:prstGeom prst="rect">
-            <a:avLst/>
-          </a:prstGeom>
-          <a:noFill/>
-        </p:spPr>
-        <p:txBody>
-          <a:bodyPr wrap="square">
-            <a:spAutoFit/>
-          </a:bodyPr>
-          <a:lstStyle/>
-          <a:p>
-            <a:pPr algn="ctr"/>
-            <a:r>
-              <a:rPr sz="2200" b="0" i="1">
-                <a:solidFill>
-                  <a:srgbClr val="8C8C8C"/>
-                </a:solidFill>
-                <a:latin typeface="Arial"/>
-              </a:rPr>
-              <a:t/>
             </a:r>
           </a:p>
         </p:txBody>
@@ -6452,23 +5577,23 @@
         </p:nvSpPr>
         <p:spPr>
           <a:xfrm>
-            <a:off x="594360" y="2258568"/>
-            <a:ext cx="11002975" cy="685800"/>
-          </a:xfrm>
-          <a:prstGeom prst="rect">
-            <a:avLst/>
-          </a:prstGeom>
-          <a:noFill/>
-        </p:spPr>
-        <p:txBody>
-          <a:bodyPr wrap="square">
-            <a:spAutoFit/>
-          </a:bodyPr>
-          <a:lstStyle/>
-          <a:p>
-            <a:pPr algn="ctr"/>
-            <a:r>
-              <a:rPr sz="4400" b="1" i="0">
+            <a:off x="640080" y="2052828"/>
+            <a:ext cx="10911535" cy="731520"/>
+          </a:xfrm>
+          <a:prstGeom prst="rect">
+            <a:avLst/>
+          </a:prstGeom>
+          <a:noFill/>
+        </p:spPr>
+        <p:txBody>
+          <a:bodyPr wrap="square">
+            <a:spAutoFit/>
+          </a:bodyPr>
+          <a:lstStyle/>
+          <a:p>
+            <a:pPr algn="ctr"/>
+            <a:r>
+              <a:rPr sz="4800" b="1" i="0">
                 <a:solidFill>
                   <a:srgbClr val="FFFFFF"/>
                 </a:solidFill>
@@ -6487,99 +5612,29 @@
         </p:nvSpPr>
         <p:spPr>
           <a:xfrm>
-            <a:off x="594360" y="2980944"/>
-            <a:ext cx="11002975" cy="347472"/>
-          </a:xfrm>
-          <a:prstGeom prst="rect">
-            <a:avLst/>
-          </a:prstGeom>
-          <a:noFill/>
-        </p:spPr>
-        <p:txBody>
-          <a:bodyPr wrap="square">
-            <a:spAutoFit/>
-          </a:bodyPr>
-          <a:lstStyle/>
-          <a:p>
-            <a:pPr algn="ctr"/>
-            <a:r>
-              <a:rPr sz="2200" b="0" i="1">
-                <a:solidFill>
-                  <a:srgbClr val="8C8C8C"/>
-                </a:solidFill>
-                <a:latin typeface="Arial"/>
-              </a:rPr>
-              <a:t/>
-            </a:r>
-          </a:p>
-        </p:txBody>
-      </p:sp>
-      <p:sp>
-        <p:nvSpPr>
-          <p:cNvPr id="4" name="TextBox 3"/>
-          <p:cNvSpPr txBox="1"/>
-          <p:nvPr/>
-        </p:nvSpPr>
-        <p:spPr>
-          <a:xfrm>
-            <a:off x="594360" y="3529584"/>
-            <a:ext cx="11002975" cy="685800"/>
-          </a:xfrm>
-          <a:prstGeom prst="rect">
-            <a:avLst/>
-          </a:prstGeom>
-          <a:noFill/>
-        </p:spPr>
-        <p:txBody>
-          <a:bodyPr wrap="square">
-            <a:spAutoFit/>
-          </a:bodyPr>
-          <a:lstStyle/>
-          <a:p>
-            <a:pPr algn="ctr"/>
-            <a:r>
-              <a:rPr sz="4266" b="1" i="0">
+            <a:off x="640080" y="2985516"/>
+            <a:ext cx="10911535" cy="731520"/>
+          </a:xfrm>
+          <a:prstGeom prst="rect">
+            <a:avLst/>
+          </a:prstGeom>
+          <a:noFill/>
+        </p:spPr>
+        <p:txBody>
+          <a:bodyPr wrap="square">
+            <a:spAutoFit/>
+          </a:bodyPr>
+          <a:lstStyle/>
+          <a:p>
+            <a:pPr algn="ctr"/>
+            <a:r>
+              <a:rPr sz="4600" b="1" i="0">
                 <a:solidFill>
                   <a:srgbClr val="FFFFFF"/>
                 </a:solidFill>
                 <a:latin typeface="Arial"/>
               </a:rPr>
               <a:t>A Ti somente pertence todo louvor</a:t>
-            </a:r>
-          </a:p>
-        </p:txBody>
-      </p:sp>
-      <p:sp>
-        <p:nvSpPr>
-          <p:cNvPr id="5" name="TextBox 4"/>
-          <p:cNvSpPr txBox="1"/>
-          <p:nvPr/>
-        </p:nvSpPr>
-        <p:spPr>
-          <a:xfrm>
-            <a:off x="594360" y="4251960"/>
-            <a:ext cx="11002975" cy="347472"/>
-          </a:xfrm>
-          <a:prstGeom prst="rect">
-            <a:avLst/>
-          </a:prstGeom>
-          <a:noFill/>
-        </p:spPr>
-        <p:txBody>
-          <a:bodyPr wrap="square">
-            <a:spAutoFit/>
-          </a:bodyPr>
-          <a:lstStyle/>
-          <a:p>
-            <a:pPr algn="ctr"/>
-            <a:r>
-              <a:rPr sz="2200" b="0" i="1">
-                <a:solidFill>
-                  <a:srgbClr val="8C8C8C"/>
-                </a:solidFill>
-                <a:latin typeface="Arial"/>
-              </a:rPr>
-              <a:t/>
             </a:r>
           </a:p>
         </p:txBody>
@@ -6618,23 +5673,23 @@
         </p:nvSpPr>
         <p:spPr>
           <a:xfrm>
-            <a:off x="594360" y="2258568"/>
-            <a:ext cx="11002975" cy="685800"/>
-          </a:xfrm>
-          <a:prstGeom prst="rect">
-            <a:avLst/>
-          </a:prstGeom>
-          <a:noFill/>
-        </p:spPr>
-        <p:txBody>
-          <a:bodyPr wrap="square">
-            <a:spAutoFit/>
-          </a:bodyPr>
-          <a:lstStyle/>
-          <a:p>
-            <a:pPr algn="ctr"/>
-            <a:r>
-              <a:rPr sz="3911" b="1" i="0">
+            <a:off x="640080" y="2052828"/>
+            <a:ext cx="10911535" cy="731520"/>
+          </a:xfrm>
+          <a:prstGeom prst="rect">
+            <a:avLst/>
+          </a:prstGeom>
+          <a:noFill/>
+        </p:spPr>
+        <p:txBody>
+          <a:bodyPr wrap="square">
+            <a:spAutoFit/>
+          </a:bodyPr>
+          <a:lstStyle/>
+          <a:p>
+            <a:pPr algn="ctr"/>
+            <a:r>
+              <a:rPr sz="4200" b="1" i="0">
                 <a:solidFill>
                   <a:srgbClr val="FFFFFF"/>
                 </a:solidFill>
@@ -6653,99 +5708,29 @@
         </p:nvSpPr>
         <p:spPr>
           <a:xfrm>
-            <a:off x="594360" y="2980944"/>
-            <a:ext cx="11002975" cy="347472"/>
-          </a:xfrm>
-          <a:prstGeom prst="rect">
-            <a:avLst/>
-          </a:prstGeom>
-          <a:noFill/>
-        </p:spPr>
-        <p:txBody>
-          <a:bodyPr wrap="square">
-            <a:spAutoFit/>
-          </a:bodyPr>
-          <a:lstStyle/>
-          <a:p>
-            <a:pPr algn="ctr"/>
-            <a:r>
-              <a:rPr sz="2200" b="0" i="1">
-                <a:solidFill>
-                  <a:srgbClr val="8C8C8C"/>
-                </a:solidFill>
-                <a:latin typeface="Arial"/>
-              </a:rPr>
-              <a:t/>
-            </a:r>
-          </a:p>
-        </p:txBody>
-      </p:sp>
-      <p:sp>
-        <p:nvSpPr>
-          <p:cNvPr id="4" name="TextBox 3"/>
-          <p:cNvSpPr txBox="1"/>
-          <p:nvPr/>
-        </p:nvSpPr>
-        <p:spPr>
-          <a:xfrm>
-            <a:off x="594360" y="3529584"/>
-            <a:ext cx="11002975" cy="685800"/>
-          </a:xfrm>
-          <a:prstGeom prst="rect">
-            <a:avLst/>
-          </a:prstGeom>
-          <a:noFill/>
-        </p:spPr>
-        <p:txBody>
-          <a:bodyPr wrap="square">
-            <a:spAutoFit/>
-          </a:bodyPr>
-          <a:lstStyle/>
-          <a:p>
-            <a:pPr algn="ctr"/>
-            <a:r>
-              <a:rPr sz="4400" b="1" i="0">
+            <a:off x="640080" y="2985516"/>
+            <a:ext cx="10911535" cy="731520"/>
+          </a:xfrm>
+          <a:prstGeom prst="rect">
+            <a:avLst/>
+          </a:prstGeom>
+          <a:noFill/>
+        </p:spPr>
+        <p:txBody>
+          <a:bodyPr wrap="square">
+            <a:spAutoFit/>
+          </a:bodyPr>
+          <a:lstStyle/>
+          <a:p>
+            <a:pPr algn="ctr"/>
+            <a:r>
+              <a:rPr sz="4800" b="1" i="0">
                 <a:solidFill>
                   <a:srgbClr val="FFFFFF"/>
                 </a:solidFill>
                 <a:latin typeface="Arial"/>
               </a:rPr>
               <a:t>Cantamos da libertação</a:t>
-            </a:r>
-          </a:p>
-        </p:txBody>
-      </p:sp>
-      <p:sp>
-        <p:nvSpPr>
-          <p:cNvPr id="5" name="TextBox 4"/>
-          <p:cNvSpPr txBox="1"/>
-          <p:nvPr/>
-        </p:nvSpPr>
-        <p:spPr>
-          <a:xfrm>
-            <a:off x="594360" y="4251960"/>
-            <a:ext cx="11002975" cy="347472"/>
-          </a:xfrm>
-          <a:prstGeom prst="rect">
-            <a:avLst/>
-          </a:prstGeom>
-          <a:noFill/>
-        </p:spPr>
-        <p:txBody>
-          <a:bodyPr wrap="square">
-            <a:spAutoFit/>
-          </a:bodyPr>
-          <a:lstStyle/>
-          <a:p>
-            <a:pPr algn="ctr"/>
-            <a:r>
-              <a:rPr sz="2200" b="0" i="1">
-                <a:solidFill>
-                  <a:srgbClr val="8C8C8C"/>
-                </a:solidFill>
-                <a:latin typeface="Arial"/>
-              </a:rPr>
-              <a:t/>
             </a:r>
           </a:p>
         </p:txBody>
@@ -6784,23 +5769,23 @@
         </p:nvSpPr>
         <p:spPr>
           <a:xfrm>
-            <a:off x="594360" y="2258568"/>
-            <a:ext cx="11002975" cy="685800"/>
-          </a:xfrm>
-          <a:prstGeom prst="rect">
-            <a:avLst/>
-          </a:prstGeom>
-          <a:noFill/>
-        </p:spPr>
-        <p:txBody>
-          <a:bodyPr wrap="square">
-            <a:spAutoFit/>
-          </a:bodyPr>
-          <a:lstStyle/>
-          <a:p>
-            <a:pPr algn="ctr"/>
-            <a:r>
-              <a:rPr sz="3705" b="1" i="0">
+            <a:off x="640080" y="2052828"/>
+            <a:ext cx="10911535" cy="731520"/>
+          </a:xfrm>
+          <a:prstGeom prst="rect">
+            <a:avLst/>
+          </a:prstGeom>
+          <a:noFill/>
+        </p:spPr>
+        <p:txBody>
+          <a:bodyPr wrap="square">
+            <a:spAutoFit/>
+          </a:bodyPr>
+          <a:lstStyle/>
+          <a:p>
+            <a:pPr algn="ctr"/>
+            <a:r>
+              <a:rPr sz="4000" b="1" i="0">
                 <a:solidFill>
                   <a:srgbClr val="FFFFFF"/>
                 </a:solidFill>
@@ -6819,99 +5804,29 @@
         </p:nvSpPr>
         <p:spPr>
           <a:xfrm>
-            <a:off x="594360" y="2980944"/>
-            <a:ext cx="11002975" cy="347472"/>
-          </a:xfrm>
-          <a:prstGeom prst="rect">
-            <a:avLst/>
-          </a:prstGeom>
-          <a:noFill/>
-        </p:spPr>
-        <p:txBody>
-          <a:bodyPr wrap="square">
-            <a:spAutoFit/>
-          </a:bodyPr>
-          <a:lstStyle/>
-          <a:p>
-            <a:pPr algn="ctr"/>
-            <a:r>
-              <a:rPr sz="2200" b="0" i="1">
-                <a:solidFill>
-                  <a:srgbClr val="8C8C8C"/>
-                </a:solidFill>
-                <a:latin typeface="Arial"/>
-              </a:rPr>
-              <a:t/>
-            </a:r>
-          </a:p>
-        </p:txBody>
-      </p:sp>
-      <p:sp>
-        <p:nvSpPr>
-          <p:cNvPr id="4" name="TextBox 3"/>
-          <p:cNvSpPr txBox="1"/>
-          <p:nvPr/>
-        </p:nvSpPr>
-        <p:spPr>
-          <a:xfrm>
-            <a:off x="594360" y="3529584"/>
-            <a:ext cx="11002975" cy="685800"/>
-          </a:xfrm>
-          <a:prstGeom prst="rect">
-            <a:avLst/>
-          </a:prstGeom>
-          <a:noFill/>
-        </p:spPr>
-        <p:txBody>
-          <a:bodyPr wrap="square">
-            <a:spAutoFit/>
-          </a:bodyPr>
-          <a:lstStyle/>
-          <a:p>
-            <a:pPr algn="ctr"/>
-            <a:r>
-              <a:rPr sz="3911" b="1" i="0">
+            <a:off x="640080" y="2985516"/>
+            <a:ext cx="10911535" cy="731520"/>
+          </a:xfrm>
+          <a:prstGeom prst="rect">
+            <a:avLst/>
+          </a:prstGeom>
+          <a:noFill/>
+        </p:spPr>
+        <p:txBody>
+          <a:bodyPr wrap="square">
+            <a:spAutoFit/>
+          </a:bodyPr>
+          <a:lstStyle/>
+          <a:p>
+            <a:pPr algn="ctr"/>
+            <a:r>
+              <a:rPr sz="4200" b="1" i="0">
                 <a:solidFill>
                   <a:srgbClr val="FFFFFF"/>
                 </a:solidFill>
                 <a:latin typeface="Arial"/>
               </a:rPr>
               <a:t>Mas o Teu amor é ainda mais profundo</a:t>
-            </a:r>
-          </a:p>
-        </p:txBody>
-      </p:sp>
-      <p:sp>
-        <p:nvSpPr>
-          <p:cNvPr id="5" name="TextBox 4"/>
-          <p:cNvSpPr txBox="1"/>
-          <p:nvPr/>
-        </p:nvSpPr>
-        <p:spPr>
-          <a:xfrm>
-            <a:off x="594360" y="4251960"/>
-            <a:ext cx="11002975" cy="347472"/>
-          </a:xfrm>
-          <a:prstGeom prst="rect">
-            <a:avLst/>
-          </a:prstGeom>
-          <a:noFill/>
-        </p:spPr>
-        <p:txBody>
-          <a:bodyPr wrap="square">
-            <a:spAutoFit/>
-          </a:bodyPr>
-          <a:lstStyle/>
-          <a:p>
-            <a:pPr algn="ctr"/>
-            <a:r>
-              <a:rPr sz="2200" b="0" i="1">
-                <a:solidFill>
-                  <a:srgbClr val="8C8C8C"/>
-                </a:solidFill>
-                <a:latin typeface="Arial"/>
-              </a:rPr>
-              <a:t/>
             </a:r>
           </a:p>
         </p:txBody>
@@ -6950,23 +5865,23 @@
         </p:nvSpPr>
         <p:spPr>
           <a:xfrm>
-            <a:off x="594360" y="2258568"/>
-            <a:ext cx="11002975" cy="685800"/>
-          </a:xfrm>
-          <a:prstGeom prst="rect">
-            <a:avLst/>
-          </a:prstGeom>
-          <a:noFill/>
-        </p:spPr>
-        <p:txBody>
-          <a:bodyPr wrap="square">
-            <a:spAutoFit/>
-          </a:bodyPr>
-          <a:lstStyle/>
-          <a:p>
-            <a:pPr algn="ctr"/>
-            <a:r>
-              <a:rPr sz="4400" b="1" i="0">
+            <a:off x="640080" y="2052828"/>
+            <a:ext cx="10911535" cy="731520"/>
+          </a:xfrm>
+          <a:prstGeom prst="rect">
+            <a:avLst/>
+          </a:prstGeom>
+          <a:noFill/>
+        </p:spPr>
+        <p:txBody>
+          <a:bodyPr wrap="square">
+            <a:spAutoFit/>
+          </a:bodyPr>
+          <a:lstStyle/>
+          <a:p>
+            <a:pPr algn="ctr"/>
+            <a:r>
+              <a:rPr sz="4800" b="1" i="0">
                 <a:solidFill>
                   <a:srgbClr val="FFFFFF"/>
                 </a:solidFill>
@@ -6985,99 +5900,29 @@
         </p:nvSpPr>
         <p:spPr>
           <a:xfrm>
-            <a:off x="594360" y="2980944"/>
-            <a:ext cx="11002975" cy="347472"/>
-          </a:xfrm>
-          <a:prstGeom prst="rect">
-            <a:avLst/>
-          </a:prstGeom>
-          <a:noFill/>
-        </p:spPr>
-        <p:txBody>
-          <a:bodyPr wrap="square">
-            <a:spAutoFit/>
-          </a:bodyPr>
-          <a:lstStyle/>
-          <a:p>
-            <a:pPr algn="ctr"/>
-            <a:r>
-              <a:rPr sz="2200" b="0" i="1">
-                <a:solidFill>
-                  <a:srgbClr val="8C8C8C"/>
-                </a:solidFill>
-                <a:latin typeface="Arial"/>
-              </a:rPr>
-              <a:t/>
-            </a:r>
-          </a:p>
-        </p:txBody>
-      </p:sp>
-      <p:sp>
-        <p:nvSpPr>
-          <p:cNvPr id="4" name="TextBox 3"/>
-          <p:cNvSpPr txBox="1"/>
-          <p:nvPr/>
-        </p:nvSpPr>
-        <p:spPr>
-          <a:xfrm>
-            <a:off x="594360" y="3529584"/>
-            <a:ext cx="11002975" cy="685800"/>
-          </a:xfrm>
-          <a:prstGeom prst="rect">
-            <a:avLst/>
-          </a:prstGeom>
-          <a:noFill/>
-        </p:spPr>
-        <p:txBody>
-          <a:bodyPr wrap="square">
-            <a:spAutoFit/>
-          </a:bodyPr>
-          <a:lstStyle/>
-          <a:p>
-            <a:pPr algn="ctr"/>
-            <a:r>
-              <a:rPr sz="4400" b="1" i="0">
+            <a:off x="640080" y="2985516"/>
+            <a:ext cx="10911535" cy="731520"/>
+          </a:xfrm>
+          <a:prstGeom prst="rect">
+            <a:avLst/>
+          </a:prstGeom>
+          <a:noFill/>
+        </p:spPr>
+        <p:txBody>
+          <a:bodyPr wrap="square">
+            <a:spAutoFit/>
+          </a:bodyPr>
+          <a:lstStyle/>
+          <a:p>
+            <a:pPr algn="ctr"/>
+            <a:r>
+              <a:rPr sz="4800" b="1" i="0">
                 <a:solidFill>
                   <a:srgbClr val="FFFFFF"/>
                 </a:solidFill>
                 <a:latin typeface="Arial"/>
               </a:rPr>
               <a:t>Só Tu podes resgatar</a:t>
-            </a:r>
-          </a:p>
-        </p:txBody>
-      </p:sp>
-      <p:sp>
-        <p:nvSpPr>
-          <p:cNvPr id="5" name="TextBox 4"/>
-          <p:cNvSpPr txBox="1"/>
-          <p:nvPr/>
-        </p:nvSpPr>
-        <p:spPr>
-          <a:xfrm>
-            <a:off x="594360" y="4251960"/>
-            <a:ext cx="11002975" cy="347472"/>
-          </a:xfrm>
-          <a:prstGeom prst="rect">
-            <a:avLst/>
-          </a:prstGeom>
-          <a:noFill/>
-        </p:spPr>
-        <p:txBody>
-          <a:bodyPr wrap="square">
-            <a:spAutoFit/>
-          </a:bodyPr>
-          <a:lstStyle/>
-          <a:p>
-            <a:pPr algn="ctr"/>
-            <a:r>
-              <a:rPr sz="2200" b="0" i="1">
-                <a:solidFill>
-                  <a:srgbClr val="8C8C8C"/>
-                </a:solidFill>
-                <a:latin typeface="Arial"/>
-              </a:rPr>
-              <a:t/>
             </a:r>
           </a:p>
         </p:txBody>
@@ -7116,23 +5961,23 @@
         </p:nvSpPr>
         <p:spPr>
           <a:xfrm>
-            <a:off x="594360" y="2258568"/>
-            <a:ext cx="11002975" cy="685800"/>
-          </a:xfrm>
-          <a:prstGeom prst="rect">
-            <a:avLst/>
-          </a:prstGeom>
-          <a:noFill/>
-        </p:spPr>
-        <p:txBody>
-          <a:bodyPr wrap="square">
-            <a:spAutoFit/>
-          </a:bodyPr>
-          <a:lstStyle/>
-          <a:p>
-            <a:pPr algn="ctr"/>
-            <a:r>
-              <a:rPr sz="4400" b="1" i="0">
+            <a:off x="640080" y="2052828"/>
+            <a:ext cx="10911535" cy="731520"/>
+          </a:xfrm>
+          <a:prstGeom prst="rect">
+            <a:avLst/>
+          </a:prstGeom>
+          <a:noFill/>
+        </p:spPr>
+        <p:txBody>
+          <a:bodyPr wrap="square">
+            <a:spAutoFit/>
+          </a:bodyPr>
+          <a:lstStyle/>
+          <a:p>
+            <a:pPr algn="ctr"/>
+            <a:r>
+              <a:rPr sz="4800" b="1" i="0">
                 <a:solidFill>
                   <a:srgbClr val="FFFFFF"/>
                 </a:solidFill>
@@ -7151,99 +5996,29 @@
         </p:nvSpPr>
         <p:spPr>
           <a:xfrm>
-            <a:off x="594360" y="2980944"/>
-            <a:ext cx="11002975" cy="347472"/>
-          </a:xfrm>
-          <a:prstGeom prst="rect">
-            <a:avLst/>
-          </a:prstGeom>
-          <a:noFill/>
-        </p:spPr>
-        <p:txBody>
-          <a:bodyPr wrap="square">
-            <a:spAutoFit/>
-          </a:bodyPr>
-          <a:lstStyle/>
-          <a:p>
-            <a:pPr algn="ctr"/>
-            <a:r>
-              <a:rPr sz="2200" b="0" i="1">
-                <a:solidFill>
-                  <a:srgbClr val="8C8C8C"/>
-                </a:solidFill>
-                <a:latin typeface="Arial"/>
-              </a:rPr>
-              <a:t/>
-            </a:r>
-          </a:p>
-        </p:txBody>
-      </p:sp>
-      <p:sp>
-        <p:nvSpPr>
-          <p:cNvPr id="4" name="TextBox 3"/>
-          <p:cNvSpPr txBox="1"/>
-          <p:nvPr/>
-        </p:nvSpPr>
-        <p:spPr>
-          <a:xfrm>
-            <a:off x="594360" y="3529584"/>
-            <a:ext cx="11002975" cy="685800"/>
-          </a:xfrm>
-          <a:prstGeom prst="rect">
-            <a:avLst/>
-          </a:prstGeom>
-          <a:noFill/>
-        </p:spPr>
-        <p:txBody>
-          <a:bodyPr wrap="square">
-            <a:spAutoFit/>
-          </a:bodyPr>
-          <a:lstStyle/>
-          <a:p>
-            <a:pPr algn="ctr"/>
-            <a:r>
-              <a:rPr sz="4400" b="1" i="0">
+            <a:off x="640080" y="2985516"/>
+            <a:ext cx="10911535" cy="731520"/>
+          </a:xfrm>
+          <a:prstGeom prst="rect">
+            <a:avLst/>
+          </a:prstGeom>
+          <a:noFill/>
+        </p:spPr>
+        <p:txBody>
+          <a:bodyPr wrap="square">
+            <a:spAutoFit/>
+          </a:bodyPr>
+          <a:lstStyle/>
+          <a:p>
+            <a:pPr algn="ctr"/>
+            <a:r>
+              <a:rPr sz="4800" b="1" i="0">
                 <a:solidFill>
                   <a:srgbClr val="FFFFFF"/>
                 </a:solidFill>
                 <a:latin typeface="Arial"/>
               </a:rPr>
               <a:t>Tu desceste até nós</a:t>
-            </a:r>
-          </a:p>
-        </p:txBody>
-      </p:sp>
-      <p:sp>
-        <p:nvSpPr>
-          <p:cNvPr id="5" name="TextBox 4"/>
-          <p:cNvSpPr txBox="1"/>
-          <p:nvPr/>
-        </p:nvSpPr>
-        <p:spPr>
-          <a:xfrm>
-            <a:off x="594360" y="4251960"/>
-            <a:ext cx="11002975" cy="347472"/>
-          </a:xfrm>
-          <a:prstGeom prst="rect">
-            <a:avLst/>
-          </a:prstGeom>
-          <a:noFill/>
-        </p:spPr>
-        <p:txBody>
-          <a:bodyPr wrap="square">
-            <a:spAutoFit/>
-          </a:bodyPr>
-          <a:lstStyle/>
-          <a:p>
-            <a:pPr algn="ctr"/>
-            <a:r>
-              <a:rPr sz="2200" b="0" i="1">
-                <a:solidFill>
-                  <a:srgbClr val="8C8C8C"/>
-                </a:solidFill>
-                <a:latin typeface="Arial"/>
-              </a:rPr>
-              <a:t/>
             </a:r>
           </a:p>
         </p:txBody>
@@ -7282,23 +6057,23 @@
         </p:nvSpPr>
         <p:spPr>
           <a:xfrm>
-            <a:off x="594360" y="2258568"/>
-            <a:ext cx="11002975" cy="685800"/>
-          </a:xfrm>
-          <a:prstGeom prst="rect">
-            <a:avLst/>
-          </a:prstGeom>
-          <a:noFill/>
-        </p:spPr>
-        <p:txBody>
-          <a:bodyPr wrap="square">
-            <a:spAutoFit/>
-          </a:bodyPr>
-          <a:lstStyle/>
-          <a:p>
-            <a:pPr algn="ctr"/>
-            <a:r>
-              <a:rPr sz="4400" b="1" i="0">
+            <a:off x="640080" y="2052828"/>
+            <a:ext cx="10911535" cy="731520"/>
+          </a:xfrm>
+          <a:prstGeom prst="rect">
+            <a:avLst/>
+          </a:prstGeom>
+          <a:noFill/>
+        </p:spPr>
+        <p:txBody>
+          <a:bodyPr wrap="square">
+            <a:spAutoFit/>
+          </a:bodyPr>
+          <a:lstStyle/>
+          <a:p>
+            <a:pPr algn="ctr"/>
+            <a:r>
+              <a:rPr sz="4800" b="1" i="0">
                 <a:solidFill>
                   <a:srgbClr val="FFFFFF"/>
                 </a:solidFill>
@@ -7317,99 +6092,29 @@
         </p:nvSpPr>
         <p:spPr>
           <a:xfrm>
-            <a:off x="594360" y="2980944"/>
-            <a:ext cx="11002975" cy="347472"/>
-          </a:xfrm>
-          <a:prstGeom prst="rect">
-            <a:avLst/>
-          </a:prstGeom>
-          <a:noFill/>
-        </p:spPr>
-        <p:txBody>
-          <a:bodyPr wrap="square">
-            <a:spAutoFit/>
-          </a:bodyPr>
-          <a:lstStyle/>
-          <a:p>
-            <a:pPr algn="ctr"/>
-            <a:r>
-              <a:rPr sz="2200" b="0" i="1">
-                <a:solidFill>
-                  <a:srgbClr val="8C8C8C"/>
-                </a:solidFill>
-                <a:latin typeface="Arial"/>
-              </a:rPr>
-              <a:t/>
-            </a:r>
-          </a:p>
-        </p:txBody>
-      </p:sp>
-      <p:sp>
-        <p:nvSpPr>
-          <p:cNvPr id="4" name="TextBox 3"/>
-          <p:cNvSpPr txBox="1"/>
-          <p:nvPr/>
-        </p:nvSpPr>
-        <p:spPr>
-          <a:xfrm>
-            <a:off x="594360" y="3529584"/>
-            <a:ext cx="11002975" cy="685800"/>
-          </a:xfrm>
-          <a:prstGeom prst="rect">
-            <a:avLst/>
-          </a:prstGeom>
-          <a:noFill/>
-        </p:spPr>
-        <p:txBody>
-          <a:bodyPr wrap="square">
-            <a:spAutoFit/>
-          </a:bodyPr>
-          <a:lstStyle/>
-          <a:p>
-            <a:pPr algn="ctr"/>
-            <a:r>
-              <a:rPr sz="4266" b="1" i="0">
+            <a:off x="640080" y="2985516"/>
+            <a:ext cx="10911535" cy="731520"/>
+          </a:xfrm>
+          <a:prstGeom prst="rect">
+            <a:avLst/>
+          </a:prstGeom>
+          <a:noFill/>
+        </p:spPr>
+        <p:txBody>
+          <a:bodyPr wrap="square">
+            <a:spAutoFit/>
+          </a:bodyPr>
+          <a:lstStyle/>
+          <a:p>
+            <a:pPr algn="ctr"/>
+            <a:r>
+              <a:rPr sz="4600" b="1" i="0">
                 <a:solidFill>
                   <a:srgbClr val="FFFFFF"/>
                 </a:solidFill>
                 <a:latin typeface="Arial"/>
               </a:rPr>
               <a:t>A Ti somente pertence todo louvor</a:t>
-            </a:r>
-          </a:p>
-        </p:txBody>
-      </p:sp>
-      <p:sp>
-        <p:nvSpPr>
-          <p:cNvPr id="5" name="TextBox 4"/>
-          <p:cNvSpPr txBox="1"/>
-          <p:nvPr/>
-        </p:nvSpPr>
-        <p:spPr>
-          <a:xfrm>
-            <a:off x="594360" y="4251960"/>
-            <a:ext cx="11002975" cy="347472"/>
-          </a:xfrm>
-          <a:prstGeom prst="rect">
-            <a:avLst/>
-          </a:prstGeom>
-          <a:noFill/>
-        </p:spPr>
-        <p:txBody>
-          <a:bodyPr wrap="square">
-            <a:spAutoFit/>
-          </a:bodyPr>
-          <a:lstStyle/>
-          <a:p>
-            <a:pPr algn="ctr"/>
-            <a:r>
-              <a:rPr sz="2200" b="0" i="1">
-                <a:solidFill>
-                  <a:srgbClr val="8C8C8C"/>
-                </a:solidFill>
-                <a:latin typeface="Arial"/>
-              </a:rPr>
-              <a:t/>
             </a:r>
           </a:p>
         </p:txBody>
@@ -7448,23 +6153,23 @@
         </p:nvSpPr>
         <p:spPr>
           <a:xfrm>
-            <a:off x="594360" y="2258568"/>
-            <a:ext cx="11002975" cy="685800"/>
-          </a:xfrm>
-          <a:prstGeom prst="rect">
-            <a:avLst/>
-          </a:prstGeom>
-          <a:noFill/>
-        </p:spPr>
-        <p:txBody>
-          <a:bodyPr wrap="square">
-            <a:spAutoFit/>
-          </a:bodyPr>
-          <a:lstStyle/>
-          <a:p>
-            <a:pPr algn="ctr"/>
-            <a:r>
-              <a:rPr sz="3911" b="1" i="0">
+            <a:off x="640080" y="2052828"/>
+            <a:ext cx="10911535" cy="731520"/>
+          </a:xfrm>
+          <a:prstGeom prst="rect">
+            <a:avLst/>
+          </a:prstGeom>
+          <a:noFill/>
+        </p:spPr>
+        <p:txBody>
+          <a:bodyPr wrap="square">
+            <a:spAutoFit/>
+          </a:bodyPr>
+          <a:lstStyle/>
+          <a:p>
+            <a:pPr algn="ctr"/>
+            <a:r>
+              <a:rPr sz="4200" b="1" i="0">
                 <a:solidFill>
                   <a:srgbClr val="FFFFFF"/>
                 </a:solidFill>
@@ -7483,99 +6188,29 @@
         </p:nvSpPr>
         <p:spPr>
           <a:xfrm>
-            <a:off x="594360" y="2980944"/>
-            <a:ext cx="11002975" cy="347472"/>
-          </a:xfrm>
-          <a:prstGeom prst="rect">
-            <a:avLst/>
-          </a:prstGeom>
-          <a:noFill/>
-        </p:spPr>
-        <p:txBody>
-          <a:bodyPr wrap="square">
-            <a:spAutoFit/>
-          </a:bodyPr>
-          <a:lstStyle/>
-          <a:p>
-            <a:pPr algn="ctr"/>
-            <a:r>
-              <a:rPr sz="2200" b="0" i="1">
-                <a:solidFill>
-                  <a:srgbClr val="8C8C8C"/>
-                </a:solidFill>
-                <a:latin typeface="Arial"/>
-              </a:rPr>
-              <a:t/>
-            </a:r>
-          </a:p>
-        </p:txBody>
-      </p:sp>
-      <p:sp>
-        <p:nvSpPr>
-          <p:cNvPr id="4" name="TextBox 3"/>
-          <p:cNvSpPr txBox="1"/>
-          <p:nvPr/>
-        </p:nvSpPr>
-        <p:spPr>
-          <a:xfrm>
-            <a:off x="594360" y="3529584"/>
-            <a:ext cx="11002975" cy="685800"/>
-          </a:xfrm>
-          <a:prstGeom prst="rect">
-            <a:avLst/>
-          </a:prstGeom>
-          <a:noFill/>
-        </p:spPr>
-        <p:txBody>
-          <a:bodyPr wrap="square">
-            <a:spAutoFit/>
-          </a:bodyPr>
-          <a:lstStyle/>
-          <a:p>
-            <a:pPr algn="ctr"/>
-            <a:r>
-              <a:rPr sz="4400" b="1" i="0">
+            <a:off x="640080" y="2985516"/>
+            <a:ext cx="10911535" cy="731520"/>
+          </a:xfrm>
+          <a:prstGeom prst="rect">
+            <a:avLst/>
+          </a:prstGeom>
+          <a:noFill/>
+        </p:spPr>
+        <p:txBody>
+          <a:bodyPr wrap="square">
+            <a:spAutoFit/>
+          </a:bodyPr>
+          <a:lstStyle/>
+          <a:p>
+            <a:pPr algn="ctr"/>
+            <a:r>
+              <a:rPr sz="4800" b="1" i="0">
                 <a:solidFill>
                   <a:srgbClr val="FFFFFF"/>
                 </a:solidFill>
                 <a:latin typeface="Arial"/>
               </a:rPr>
               <a:t>Cantamos da libertação</a:t>
-            </a:r>
-          </a:p>
-        </p:txBody>
-      </p:sp>
-      <p:sp>
-        <p:nvSpPr>
-          <p:cNvPr id="5" name="TextBox 4"/>
-          <p:cNvSpPr txBox="1"/>
-          <p:nvPr/>
-        </p:nvSpPr>
-        <p:spPr>
-          <a:xfrm>
-            <a:off x="594360" y="4251960"/>
-            <a:ext cx="11002975" cy="347472"/>
-          </a:xfrm>
-          <a:prstGeom prst="rect">
-            <a:avLst/>
-          </a:prstGeom>
-          <a:noFill/>
-        </p:spPr>
-        <p:txBody>
-          <a:bodyPr wrap="square">
-            <a:spAutoFit/>
-          </a:bodyPr>
-          <a:lstStyle/>
-          <a:p>
-            <a:pPr algn="ctr"/>
-            <a:r>
-              <a:rPr sz="2200" b="0" i="1">
-                <a:solidFill>
-                  <a:srgbClr val="8C8C8C"/>
-                </a:solidFill>
-                <a:latin typeface="Arial"/>
-              </a:rPr>
-              <a:t/>
             </a:r>
           </a:p>
         </p:txBody>
@@ -7614,23 +6249,23 @@
         </p:nvSpPr>
         <p:spPr>
           <a:xfrm>
-            <a:off x="594360" y="1837944"/>
-            <a:ext cx="11002975" cy="685800"/>
-          </a:xfrm>
-          <a:prstGeom prst="rect">
-            <a:avLst/>
-          </a:prstGeom>
-          <a:noFill/>
-        </p:spPr>
-        <p:txBody>
-          <a:bodyPr wrap="square">
-            <a:spAutoFit/>
-          </a:bodyPr>
-          <a:lstStyle/>
-          <a:p>
-            <a:pPr algn="ctr"/>
-            <a:r>
-              <a:rPr sz="4400" b="1" i="0">
+            <a:off x="640080" y="1650492"/>
+            <a:ext cx="10911535" cy="731520"/>
+          </a:xfrm>
+          <a:prstGeom prst="rect">
+            <a:avLst/>
+          </a:prstGeom>
+          <a:noFill/>
+        </p:spPr>
+        <p:txBody>
+          <a:bodyPr wrap="square">
+            <a:spAutoFit/>
+          </a:bodyPr>
+          <a:lstStyle/>
+          <a:p>
+            <a:pPr algn="ctr"/>
+            <a:r>
+              <a:rPr sz="4800" b="1" i="0">
                 <a:solidFill>
                   <a:srgbClr val="FFFFFF"/>
                 </a:solidFill>
@@ -7649,8 +6284,8 @@
         </p:nvSpPr>
         <p:spPr>
           <a:xfrm>
-            <a:off x="594360" y="2560320"/>
-            <a:ext cx="11002975" cy="384048"/>
+            <a:off x="640080" y="2418588"/>
+            <a:ext cx="10911535" cy="365760"/>
           </a:xfrm>
           <a:prstGeom prst="rect">
             <a:avLst/>
@@ -7667,7 +6302,7 @@
             <a:r>
               <a:rPr sz="2400" b="0" i="1">
                 <a:solidFill>
-                  <a:srgbClr val="B4B4B4"/>
+                  <a:srgbClr val="AAAAAA"/>
                 </a:solidFill>
                 <a:latin typeface="Arial"/>
               </a:rPr>
@@ -7684,8 +6319,78 @@
         </p:nvSpPr>
         <p:spPr>
           <a:xfrm>
-            <a:off x="594360" y="2980944"/>
-            <a:ext cx="11002975" cy="347472"/>
+            <a:off x="640080" y="2985516"/>
+            <a:ext cx="10911535" cy="731520"/>
+          </a:xfrm>
+          <a:prstGeom prst="rect">
+            <a:avLst/>
+          </a:prstGeom>
+          <a:noFill/>
+        </p:spPr>
+        <p:txBody>
+          <a:bodyPr wrap="square">
+            <a:spAutoFit/>
+          </a:bodyPr>
+          <a:lstStyle/>
+          <a:p>
+            <a:pPr algn="ctr"/>
+            <a:r>
+              <a:rPr sz="4800" b="1" i="0">
+                <a:solidFill>
+                  <a:srgbClr val="FFFFFF"/>
+                </a:solidFill>
+                <a:latin typeface="Arial"/>
+              </a:rPr>
+              <a:t>ただ望みは主の 深い恵み</a:t>
+            </a:r>
+          </a:p>
+        </p:txBody>
+      </p:sp>
+      <p:sp>
+        <p:nvSpPr>
+          <p:cNvPr id="5" name="TextBox 4"/>
+          <p:cNvSpPr txBox="1"/>
+          <p:nvPr/>
+        </p:nvSpPr>
+        <p:spPr>
+          <a:xfrm>
+            <a:off x="640080" y="3753612"/>
+            <a:ext cx="10911535" cy="365760"/>
+          </a:xfrm>
+          <a:prstGeom prst="rect">
+            <a:avLst/>
+          </a:prstGeom>
+          <a:noFill/>
+        </p:spPr>
+        <p:txBody>
+          <a:bodyPr wrap="square">
+            <a:spAutoFit/>
+          </a:bodyPr>
+          <a:lstStyle/>
+          <a:p>
+            <a:pPr algn="ctr"/>
+            <a:r>
+              <a:rPr sz="2400" b="0" i="1">
+                <a:solidFill>
+                  <a:srgbClr val="AAAAAA"/>
+                </a:solidFill>
+                <a:latin typeface="Arial"/>
+              </a:rPr>
+              <a:t>tada nozomi wa shu no fukai megumi</a:t>
+            </a:r>
+          </a:p>
+        </p:txBody>
+      </p:sp>
+      <p:sp>
+        <p:nvSpPr>
+          <p:cNvPr id="6" name="TextBox 5"/>
+          <p:cNvSpPr txBox="1"/>
+          <p:nvPr/>
+        </p:nvSpPr>
+        <p:spPr>
+          <a:xfrm>
+            <a:off x="640080" y="4530852"/>
+            <a:ext cx="10911535" cy="310896"/>
           </a:xfrm>
           <a:prstGeom prst="rect">
             <a:avLst/>
@@ -7702,81 +6407,11 @@
             <a:r>
               <a:rPr sz="2000" b="0" i="1">
                 <a:solidFill>
-                  <a:srgbClr val="8C8C8C"/>
-                </a:solidFill>
-                <a:latin typeface="Arial"/>
-              </a:rPr>
-              <a:t/>
-            </a:r>
-          </a:p>
-        </p:txBody>
-      </p:sp>
-      <p:sp>
-        <p:nvSpPr>
-          <p:cNvPr id="5" name="TextBox 4"/>
-          <p:cNvSpPr txBox="1"/>
-          <p:nvPr/>
-        </p:nvSpPr>
-        <p:spPr>
-          <a:xfrm>
-            <a:off x="594360" y="3529584"/>
-            <a:ext cx="11002975" cy="685800"/>
-          </a:xfrm>
-          <a:prstGeom prst="rect">
-            <a:avLst/>
-          </a:prstGeom>
-          <a:noFill/>
-        </p:spPr>
-        <p:txBody>
-          <a:bodyPr wrap="square">
-            <a:spAutoFit/>
-          </a:bodyPr>
-          <a:lstStyle/>
-          <a:p>
-            <a:pPr algn="ctr"/>
-            <a:r>
-              <a:rPr sz="4400" b="1" i="0">
-                <a:solidFill>
-                  <a:srgbClr val="FFFFFF"/>
-                </a:solidFill>
-                <a:latin typeface="Arial"/>
-              </a:rPr>
-              <a:t>ただ望みは主の 深い恵み</a:t>
-            </a:r>
-          </a:p>
-        </p:txBody>
-      </p:sp>
-      <p:sp>
-        <p:nvSpPr>
-          <p:cNvPr id="6" name="TextBox 5"/>
-          <p:cNvSpPr txBox="1"/>
-          <p:nvPr/>
-        </p:nvSpPr>
-        <p:spPr>
-          <a:xfrm>
-            <a:off x="594360" y="4251960"/>
-            <a:ext cx="11002975" cy="384048"/>
-          </a:xfrm>
-          <a:prstGeom prst="rect">
-            <a:avLst/>
-          </a:prstGeom>
-          <a:noFill/>
-        </p:spPr>
-        <p:txBody>
-          <a:bodyPr wrap="square">
-            <a:spAutoFit/>
-          </a:bodyPr>
-          <a:lstStyle/>
-          <a:p>
-            <a:pPr algn="ctr"/>
-            <a:r>
-              <a:rPr sz="2400" b="0" i="1">
-                <a:solidFill>
-                  <a:srgbClr val="B4B4B4"/>
-                </a:solidFill>
-                <a:latin typeface="Arial"/>
-              </a:rPr>
-              <a:t>tada nozomi wa shu no fukai megumi</a:t>
+                  <a:srgbClr val="828282"/>
+                </a:solidFill>
+                <a:latin typeface="Arial"/>
+              </a:rPr>
+              <a:t>Tu desceste até nós</a:t>
             </a:r>
           </a:p>
         </p:txBody>
@@ -7789,8 +6424,8 @@
         </p:nvSpPr>
         <p:spPr>
           <a:xfrm>
-            <a:off x="594360" y="4672584"/>
-            <a:ext cx="11002975" cy="347472"/>
+            <a:off x="640080" y="4896612"/>
+            <a:ext cx="10911535" cy="310896"/>
           </a:xfrm>
           <a:prstGeom prst="rect">
             <a:avLst/>
@@ -7807,11 +6442,11 @@
             <a:r>
               <a:rPr sz="2000" b="0" i="1">
                 <a:solidFill>
-                  <a:srgbClr val="8C8C8C"/>
-                </a:solidFill>
-                <a:latin typeface="Arial"/>
-              </a:rPr>
-              <a:t/>
+                  <a:srgbClr val="828282"/>
+                </a:solidFill>
+                <a:latin typeface="Arial"/>
+              </a:rPr>
+              <a:t>Nos tiraste da morte</a:t>
             </a:r>
           </a:p>
         </p:txBody>
@@ -7850,23 +6485,23 @@
         </p:nvSpPr>
         <p:spPr>
           <a:xfrm>
-            <a:off x="594360" y="1837944"/>
-            <a:ext cx="11002975" cy="685800"/>
-          </a:xfrm>
-          <a:prstGeom prst="rect">
-            <a:avLst/>
-          </a:prstGeom>
-          <a:noFill/>
-        </p:spPr>
-        <p:txBody>
-          <a:bodyPr wrap="square">
-            <a:spAutoFit/>
-          </a:bodyPr>
-          <a:lstStyle/>
-          <a:p>
-            <a:pPr algn="ctr"/>
-            <a:r>
-              <a:rPr sz="4400" b="1" i="0">
+            <a:off x="640080" y="1650492"/>
+            <a:ext cx="10911535" cy="731520"/>
+          </a:xfrm>
+          <a:prstGeom prst="rect">
+            <a:avLst/>
+          </a:prstGeom>
+          <a:noFill/>
+        </p:spPr>
+        <p:txBody>
+          <a:bodyPr wrap="square">
+            <a:spAutoFit/>
+          </a:bodyPr>
+          <a:lstStyle/>
+          <a:p>
+            <a:pPr algn="ctr"/>
+            <a:r>
+              <a:rPr sz="4800" b="1" i="0">
                 <a:solidFill>
                   <a:srgbClr val="FFFFFF"/>
                 </a:solidFill>
@@ -7885,8 +6520,8 @@
         </p:nvSpPr>
         <p:spPr>
           <a:xfrm>
-            <a:off x="594360" y="2560320"/>
-            <a:ext cx="11002975" cy="384048"/>
+            <a:off x="640080" y="2418588"/>
+            <a:ext cx="10911535" cy="365760"/>
           </a:xfrm>
           <a:prstGeom prst="rect">
             <a:avLst/>
@@ -7903,7 +6538,7 @@
             <a:r>
               <a:rPr sz="2400" b="0" i="1">
                 <a:solidFill>
-                  <a:srgbClr val="B4B4B4"/>
+                  <a:srgbClr val="AAAAAA"/>
                 </a:solidFill>
                 <a:latin typeface="Arial"/>
               </a:rPr>
@@ -7920,8 +6555,78 @@
         </p:nvSpPr>
         <p:spPr>
           <a:xfrm>
-            <a:off x="594360" y="2980944"/>
-            <a:ext cx="11002975" cy="347472"/>
+            <a:off x="640080" y="2985516"/>
+            <a:ext cx="10911535" cy="731520"/>
+          </a:xfrm>
+          <a:prstGeom prst="rect">
+            <a:avLst/>
+          </a:prstGeom>
+          <a:noFill/>
+        </p:spPr>
+        <p:txBody>
+          <a:bodyPr wrap="square">
+            <a:spAutoFit/>
+          </a:bodyPr>
+          <a:lstStyle/>
+          <a:p>
+            <a:pPr algn="ctr"/>
+            <a:r>
+              <a:rPr sz="4800" b="1" i="0">
+                <a:solidFill>
+                  <a:srgbClr val="FFFFFF"/>
+                </a:solidFill>
+                <a:latin typeface="Arial"/>
+              </a:rPr>
+              <a:t>あなただけが希望</a:t>
+            </a:r>
+          </a:p>
+        </p:txBody>
+      </p:sp>
+      <p:sp>
+        <p:nvSpPr>
+          <p:cNvPr id="5" name="TextBox 4"/>
+          <p:cNvSpPr txBox="1"/>
+          <p:nvPr/>
+        </p:nvSpPr>
+        <p:spPr>
+          <a:xfrm>
+            <a:off x="640080" y="3753612"/>
+            <a:ext cx="10911535" cy="365760"/>
+          </a:xfrm>
+          <a:prstGeom prst="rect">
+            <a:avLst/>
+          </a:prstGeom>
+          <a:noFill/>
+        </p:spPr>
+        <p:txBody>
+          <a:bodyPr wrap="square">
+            <a:spAutoFit/>
+          </a:bodyPr>
+          <a:lstStyle/>
+          <a:p>
+            <a:pPr algn="ctr"/>
+            <a:r>
+              <a:rPr sz="2400" b="0" i="1">
+                <a:solidFill>
+                  <a:srgbClr val="AAAAAA"/>
+                </a:solidFill>
+                <a:latin typeface="Arial"/>
+              </a:rPr>
+              <a:t>anata dake ga kibou</a:t>
+            </a:r>
+          </a:p>
+        </p:txBody>
+      </p:sp>
+      <p:sp>
+        <p:nvSpPr>
+          <p:cNvPr id="6" name="TextBox 5"/>
+          <p:cNvSpPr txBox="1"/>
+          <p:nvPr/>
+        </p:nvSpPr>
+        <p:spPr>
+          <a:xfrm>
+            <a:off x="640080" y="4530852"/>
+            <a:ext cx="10911535" cy="310896"/>
           </a:xfrm>
           <a:prstGeom prst="rect">
             <a:avLst/>
@@ -7938,7 +6643,7 @@
             <a:r>
               <a:rPr sz="2000" b="0" i="1">
                 <a:solidFill>
-                  <a:srgbClr val="8C8C8C"/>
+                  <a:srgbClr val="828282"/>
                 </a:solidFill>
                 <a:latin typeface="Arial"/>
               </a:rPr>
@@ -7949,84 +6654,14 @@
       </p:sp>
       <p:sp>
         <p:nvSpPr>
-          <p:cNvPr id="5" name="TextBox 4"/>
-          <p:cNvSpPr txBox="1"/>
-          <p:nvPr/>
-        </p:nvSpPr>
-        <p:spPr>
-          <a:xfrm>
-            <a:off x="594360" y="3529584"/>
-            <a:ext cx="11002975" cy="685800"/>
-          </a:xfrm>
-          <a:prstGeom prst="rect">
-            <a:avLst/>
-          </a:prstGeom>
-          <a:noFill/>
-        </p:spPr>
-        <p:txBody>
-          <a:bodyPr wrap="square">
-            <a:spAutoFit/>
-          </a:bodyPr>
-          <a:lstStyle/>
-          <a:p>
-            <a:pPr algn="ctr"/>
-            <a:r>
-              <a:rPr sz="4400" b="1" i="0">
-                <a:solidFill>
-                  <a:srgbClr val="FFFFFF"/>
-                </a:solidFill>
-                <a:latin typeface="Arial"/>
-              </a:rPr>
-              <a:t>あなただけが希望</a:t>
-            </a:r>
-          </a:p>
-        </p:txBody>
-      </p:sp>
-      <p:sp>
-        <p:nvSpPr>
-          <p:cNvPr id="6" name="TextBox 5"/>
-          <p:cNvSpPr txBox="1"/>
-          <p:nvPr/>
-        </p:nvSpPr>
-        <p:spPr>
-          <a:xfrm>
-            <a:off x="594360" y="4251960"/>
-            <a:ext cx="11002975" cy="384048"/>
-          </a:xfrm>
-          <a:prstGeom prst="rect">
-            <a:avLst/>
-          </a:prstGeom>
-          <a:noFill/>
-        </p:spPr>
-        <p:txBody>
-          <a:bodyPr wrap="square">
-            <a:spAutoFit/>
-          </a:bodyPr>
-          <a:lstStyle/>
-          <a:p>
-            <a:pPr algn="ctr"/>
-            <a:r>
-              <a:rPr sz="2400" b="0" i="1">
-                <a:solidFill>
-                  <a:srgbClr val="B4B4B4"/>
-                </a:solidFill>
-                <a:latin typeface="Arial"/>
-              </a:rPr>
-              <a:t>anata dake ga kibou</a:t>
-            </a:r>
-          </a:p>
-        </p:txBody>
-      </p:sp>
-      <p:sp>
-        <p:nvSpPr>
           <p:cNvPr id="7" name="TextBox 6"/>
           <p:cNvSpPr txBox="1"/>
           <p:nvPr/>
         </p:nvSpPr>
         <p:spPr>
           <a:xfrm>
-            <a:off x="594360" y="4672584"/>
-            <a:ext cx="11002975" cy="347472"/>
+            <a:off x="640080" y="4896612"/>
+            <a:ext cx="10911535" cy="310896"/>
           </a:xfrm>
           <a:prstGeom prst="rect">
             <a:avLst/>
@@ -8043,7 +6678,7 @@
             <a:r>
               <a:rPr sz="2000" b="0" i="1">
                 <a:solidFill>
-                  <a:srgbClr val="8C8C8C"/>
+                  <a:srgbClr val="828282"/>
                 </a:solidFill>
                 <a:latin typeface="Arial"/>
               </a:rPr>

--- a/output_pptx/You_Alone_Can_Rescue.pptx
+++ b/output_pptx/You_Alone_Can_Rescue.pptx
@@ -3596,6 +3596,76 @@
           </a:p>
         </p:txBody>
       </p:sp>
+      <p:sp>
+        <p:nvSpPr>
+          <p:cNvPr id="4" name="TextBox 3"/>
+          <p:cNvSpPr txBox="1"/>
+          <p:nvPr/>
+        </p:nvSpPr>
+        <p:spPr>
+          <a:xfrm>
+            <a:off x="640080" y="4128516"/>
+            <a:ext cx="10911535" cy="310896"/>
+          </a:xfrm>
+          <a:prstGeom prst="rect">
+            <a:avLst/>
+          </a:prstGeom>
+          <a:noFill/>
+        </p:spPr>
+        <p:txBody>
+          <a:bodyPr wrap="square">
+            <a:spAutoFit/>
+          </a:bodyPr>
+          <a:lstStyle/>
+          <a:p>
+            <a:pPr algn="ctr"/>
+            <a:r>
+              <a:rPr sz="2000" b="0" i="0">
+                <a:solidFill>
+                  <a:srgbClr val="828282"/>
+                </a:solidFill>
+                <a:latin typeface="Arial"/>
+              </a:rPr>
+              <a:t>あなたは私たちのもとに降りてこられた</a:t>
+            </a:r>
+          </a:p>
+        </p:txBody>
+      </p:sp>
+      <p:sp>
+        <p:nvSpPr>
+          <p:cNvPr id="5" name="TextBox 4"/>
+          <p:cNvSpPr txBox="1"/>
+          <p:nvPr/>
+        </p:nvSpPr>
+        <p:spPr>
+          <a:xfrm>
+            <a:off x="640080" y="4494276"/>
+            <a:ext cx="10911535" cy="310896"/>
+          </a:xfrm>
+          <a:prstGeom prst="rect">
+            <a:avLst/>
+          </a:prstGeom>
+          <a:noFill/>
+        </p:spPr>
+        <p:txBody>
+          <a:bodyPr wrap="square">
+            <a:spAutoFit/>
+          </a:bodyPr>
+          <a:lstStyle/>
+          <a:p>
+            <a:pPr algn="ctr"/>
+            <a:r>
+              <a:rPr sz="2000" b="0" i="0">
+                <a:solidFill>
+                  <a:srgbClr val="828282"/>
+                </a:solidFill>
+                <a:latin typeface="Arial"/>
+              </a:rPr>
+              <a:t>私たちを死から救い出してくださった</a:t>
+            </a:r>
+          </a:p>
+        </p:txBody>
+      </p:sp>
     </p:spTree>
   </p:cSld>
   <p:clrMapOvr>
@@ -3692,6 +3762,76 @@
           </a:p>
         </p:txBody>
       </p:sp>
+      <p:sp>
+        <p:nvSpPr>
+          <p:cNvPr id="4" name="TextBox 3"/>
+          <p:cNvSpPr txBox="1"/>
+          <p:nvPr/>
+        </p:nvSpPr>
+        <p:spPr>
+          <a:xfrm>
+            <a:off x="640080" y="4128516"/>
+            <a:ext cx="10911535" cy="310896"/>
+          </a:xfrm>
+          <a:prstGeom prst="rect">
+            <a:avLst/>
+          </a:prstGeom>
+          <a:noFill/>
+        </p:spPr>
+        <p:txBody>
+          <a:bodyPr wrap="square">
+            <a:spAutoFit/>
+          </a:bodyPr>
+          <a:lstStyle/>
+          <a:p>
+            <a:pPr algn="ctr"/>
+            <a:r>
+              <a:rPr sz="2000" b="0" i="0">
+                <a:solidFill>
+                  <a:srgbClr val="828282"/>
+                </a:solidFill>
+                <a:latin typeface="Arial"/>
+              </a:rPr>
+              <a:t>すべての賛美はあなただけのもの</a:t>
+            </a:r>
+          </a:p>
+        </p:txBody>
+      </p:sp>
+      <p:sp>
+        <p:nvSpPr>
+          <p:cNvPr id="5" name="TextBox 4"/>
+          <p:cNvSpPr txBox="1"/>
+          <p:nvPr/>
+        </p:nvSpPr>
+        <p:spPr>
+          <a:xfrm>
+            <a:off x="640080" y="4494276"/>
+            <a:ext cx="10911535" cy="310896"/>
+          </a:xfrm>
+          <a:prstGeom prst="rect">
+            <a:avLst/>
+          </a:prstGeom>
+          <a:noFill/>
+        </p:spPr>
+        <p:txBody>
+          <a:bodyPr wrap="square">
+            <a:spAutoFit/>
+          </a:bodyPr>
+          <a:lstStyle/>
+          <a:p>
+            <a:pPr algn="ctr"/>
+            <a:r>
+              <a:rPr sz="2000" b="0" i="0">
+                <a:solidFill>
+                  <a:srgbClr val="828282"/>
+                </a:solidFill>
+                <a:latin typeface="Arial"/>
+              </a:rPr>
+              <a:t>主よ、誰が自らを救うことができるでしょうか</a:t>
+            </a:r>
+          </a:p>
+        </p:txBody>
+      </p:sp>
     </p:spTree>
   </p:cSld>
   <p:clrMapOvr>
@@ -3753,6 +3893,41 @@
           </a:p>
         </p:txBody>
       </p:sp>
+      <p:sp>
+        <p:nvSpPr>
+          <p:cNvPr id="3" name="TextBox 2"/>
+          <p:cNvSpPr txBox="1"/>
+          <p:nvPr/>
+        </p:nvSpPr>
+        <p:spPr>
+          <a:xfrm>
+            <a:off x="640080" y="3845052"/>
+            <a:ext cx="10911535" cy="310896"/>
+          </a:xfrm>
+          <a:prstGeom prst="rect">
+            <a:avLst/>
+          </a:prstGeom>
+          <a:noFill/>
+        </p:spPr>
+        <p:txBody>
+          <a:bodyPr wrap="square">
+            <a:spAutoFit/>
+          </a:bodyPr>
+          <a:lstStyle/>
+          <a:p>
+            <a:pPr algn="ctr"/>
+            <a:r>
+              <a:rPr sz="2000" b="0" i="0">
+                <a:solidFill>
+                  <a:srgbClr val="828282"/>
+                </a:solidFill>
+                <a:latin typeface="Arial"/>
+              </a:rPr>
+              <a:t>誰が自らの罪を癒すことができるでしょうか</a:t>
+            </a:r>
+          </a:p>
+        </p:txBody>
+      </p:sp>
     </p:spTree>
   </p:cSld>
   <p:clrMapOvr>
@@ -4181,6 +4356,76 @@
           </a:p>
         </p:txBody>
       </p:sp>
+      <p:sp>
+        <p:nvSpPr>
+          <p:cNvPr id="4" name="TextBox 3"/>
+          <p:cNvSpPr txBox="1"/>
+          <p:nvPr/>
+        </p:nvSpPr>
+        <p:spPr>
+          <a:xfrm>
+            <a:off x="640080" y="4128516"/>
+            <a:ext cx="10911535" cy="310896"/>
+          </a:xfrm>
+          <a:prstGeom prst="rect">
+            <a:avLst/>
+          </a:prstGeom>
+          <a:noFill/>
+        </p:spPr>
+        <p:txBody>
+          <a:bodyPr wrap="square">
+            <a:spAutoFit/>
+          </a:bodyPr>
+          <a:lstStyle/>
+          <a:p>
+            <a:pPr algn="ctr"/>
+            <a:r>
+              <a:rPr sz="2000" b="0" i="0">
+                <a:solidFill>
+                  <a:srgbClr val="828282"/>
+                </a:solidFill>
+                <a:latin typeface="Arial"/>
+              </a:rPr>
+              <a:t>恥は海より深かった</a:t>
+            </a:r>
+          </a:p>
+        </p:txBody>
+      </p:sp>
+      <p:sp>
+        <p:nvSpPr>
+          <p:cNvPr id="5" name="TextBox 4"/>
+          <p:cNvSpPr txBox="1"/>
+          <p:nvPr/>
+        </p:nvSpPr>
+        <p:spPr>
+          <a:xfrm>
+            <a:off x="640080" y="4494276"/>
+            <a:ext cx="10911535" cy="310896"/>
+          </a:xfrm>
+          <a:prstGeom prst="rect">
+            <a:avLst/>
+          </a:prstGeom>
+          <a:noFill/>
+        </p:spPr>
+        <p:txBody>
+          <a:bodyPr wrap="square">
+            <a:spAutoFit/>
+          </a:bodyPr>
+          <a:lstStyle/>
+          <a:p>
+            <a:pPr algn="ctr"/>
+            <a:r>
+              <a:rPr sz="2000" b="0" i="0">
+                <a:solidFill>
+                  <a:srgbClr val="828282"/>
+                </a:solidFill>
+                <a:latin typeface="Arial"/>
+              </a:rPr>
+              <a:t>しかしあなたの愛はさらに深い</a:t>
+            </a:r>
+          </a:p>
+        </p:txBody>
+      </p:sp>
     </p:spTree>
   </p:cSld>
   <p:clrMapOvr>
@@ -4277,6 +4522,76 @@
           </a:p>
         </p:txBody>
       </p:sp>
+      <p:sp>
+        <p:nvSpPr>
+          <p:cNvPr id="4" name="TextBox 3"/>
+          <p:cNvSpPr txBox="1"/>
+          <p:nvPr/>
+        </p:nvSpPr>
+        <p:spPr>
+          <a:xfrm>
+            <a:off x="640080" y="4128516"/>
+            <a:ext cx="10911535" cy="310896"/>
+          </a:xfrm>
+          <a:prstGeom prst="rect">
+            <a:avLst/>
+          </a:prstGeom>
+          <a:noFill/>
+        </p:spPr>
+        <p:txBody>
+          <a:bodyPr wrap="square">
+            <a:spAutoFit/>
+          </a:bodyPr>
+          <a:lstStyle/>
+          <a:p>
+            <a:pPr algn="ctr"/>
+            <a:r>
+              <a:rPr sz="2000" b="0" i="0">
+                <a:solidFill>
+                  <a:srgbClr val="828282"/>
+                </a:solidFill>
+                <a:latin typeface="Arial"/>
+              </a:rPr>
+              <a:t>ただあなただけが救える</a:t>
+            </a:r>
+          </a:p>
+        </p:txBody>
+      </p:sp>
+      <p:sp>
+        <p:nvSpPr>
+          <p:cNvPr id="5" name="TextBox 4"/>
+          <p:cNvSpPr txBox="1"/>
+          <p:nvPr/>
+        </p:nvSpPr>
+        <p:spPr>
+          <a:xfrm>
+            <a:off x="640080" y="4494276"/>
+            <a:ext cx="10911535" cy="310896"/>
+          </a:xfrm>
+          <a:prstGeom prst="rect">
+            <a:avLst/>
+          </a:prstGeom>
+          <a:noFill/>
+        </p:spPr>
+        <p:txBody>
+          <a:bodyPr wrap="square">
+            <a:spAutoFit/>
+          </a:bodyPr>
+          <a:lstStyle/>
+          <a:p>
+            <a:pPr algn="ctr"/>
+            <a:r>
+              <a:rPr sz="2000" b="0" i="0">
+                <a:solidFill>
+                  <a:srgbClr val="828282"/>
+                </a:solidFill>
+                <a:latin typeface="Arial"/>
+              </a:rPr>
+              <a:t>ただあなただけが贖える</a:t>
+            </a:r>
+          </a:p>
+        </p:txBody>
+      </p:sp>
     </p:spTree>
   </p:cSld>
   <p:clrMapOvr>
@@ -4373,6 +4688,76 @@
           </a:p>
         </p:txBody>
       </p:sp>
+      <p:sp>
+        <p:nvSpPr>
+          <p:cNvPr id="4" name="TextBox 3"/>
+          <p:cNvSpPr txBox="1"/>
+          <p:nvPr/>
+        </p:nvSpPr>
+        <p:spPr>
+          <a:xfrm>
+            <a:off x="640080" y="4128516"/>
+            <a:ext cx="10911535" cy="310896"/>
+          </a:xfrm>
+          <a:prstGeom prst="rect">
+            <a:avLst/>
+          </a:prstGeom>
+          <a:noFill/>
+        </p:spPr>
+        <p:txBody>
+          <a:bodyPr wrap="square">
+            <a:spAutoFit/>
+          </a:bodyPr>
+          <a:lstStyle/>
+          <a:p>
+            <a:pPr algn="ctr"/>
+            <a:r>
+              <a:rPr sz="2000" b="0" i="0">
+                <a:solidFill>
+                  <a:srgbClr val="828282"/>
+                </a:solidFill>
+                <a:latin typeface="Arial"/>
+              </a:rPr>
+              <a:t>ただあなただけが私たちを墓から引き上げられる</a:t>
+            </a:r>
+          </a:p>
+        </p:txBody>
+      </p:sp>
+      <p:sp>
+        <p:nvSpPr>
+          <p:cNvPr id="5" name="TextBox 4"/>
+          <p:cNvSpPr txBox="1"/>
+          <p:nvPr/>
+        </p:nvSpPr>
+        <p:spPr>
+          <a:xfrm>
+            <a:off x="640080" y="4494276"/>
+            <a:ext cx="10911535" cy="310896"/>
+          </a:xfrm>
+          <a:prstGeom prst="rect">
+            <a:avLst/>
+          </a:prstGeom>
+          <a:noFill/>
+        </p:spPr>
+        <p:txBody>
+          <a:bodyPr wrap="square">
+            <a:spAutoFit/>
+          </a:bodyPr>
+          <a:lstStyle/>
+          <a:p>
+            <a:pPr algn="ctr"/>
+            <a:r>
+              <a:rPr sz="2000" b="0" i="0">
+                <a:solidFill>
+                  <a:srgbClr val="828282"/>
+                </a:solidFill>
+                <a:latin typeface="Arial"/>
+              </a:rPr>
+              <a:t>あなたは私たちのもとに降りてこられた</a:t>
+            </a:r>
+          </a:p>
+        </p:txBody>
+      </p:sp>
     </p:spTree>
   </p:cSld>
   <p:clrMapOvr>
@@ -4469,6 +4854,76 @@
           </a:p>
         </p:txBody>
       </p:sp>
+      <p:sp>
+        <p:nvSpPr>
+          <p:cNvPr id="4" name="TextBox 3"/>
+          <p:cNvSpPr txBox="1"/>
+          <p:nvPr/>
+        </p:nvSpPr>
+        <p:spPr>
+          <a:xfrm>
+            <a:off x="640080" y="4128516"/>
+            <a:ext cx="10911535" cy="310896"/>
+          </a:xfrm>
+          <a:prstGeom prst="rect">
+            <a:avLst/>
+          </a:prstGeom>
+          <a:noFill/>
+        </p:spPr>
+        <p:txBody>
+          <a:bodyPr wrap="square">
+            <a:spAutoFit/>
+          </a:bodyPr>
+          <a:lstStyle/>
+          <a:p>
+            <a:pPr algn="ctr"/>
+            <a:r>
+              <a:rPr sz="2000" b="0" i="0">
+                <a:solidFill>
+                  <a:srgbClr val="828282"/>
+                </a:solidFill>
+                <a:latin typeface="Arial"/>
+              </a:rPr>
+              <a:t>私たちを死から救い出してくださった</a:t>
+            </a:r>
+          </a:p>
+        </p:txBody>
+      </p:sp>
+      <p:sp>
+        <p:nvSpPr>
+          <p:cNvPr id="5" name="TextBox 4"/>
+          <p:cNvSpPr txBox="1"/>
+          <p:nvPr/>
+        </p:nvSpPr>
+        <p:spPr>
+          <a:xfrm>
+            <a:off x="640080" y="4494276"/>
+            <a:ext cx="10911535" cy="310896"/>
+          </a:xfrm>
+          <a:prstGeom prst="rect">
+            <a:avLst/>
+          </a:prstGeom>
+          <a:noFill/>
+        </p:spPr>
+        <p:txBody>
+          <a:bodyPr wrap="square">
+            <a:spAutoFit/>
+          </a:bodyPr>
+          <a:lstStyle/>
+          <a:p>
+            <a:pPr algn="ctr"/>
+            <a:r>
+              <a:rPr sz="2000" b="0" i="0">
+                <a:solidFill>
+                  <a:srgbClr val="828282"/>
+                </a:solidFill>
+                <a:latin typeface="Arial"/>
+              </a:rPr>
+              <a:t>すべての賛美はあなただけのもの</a:t>
+            </a:r>
+          </a:p>
+        </p:txBody>
+      </p:sp>
     </p:spTree>
   </p:cSld>
   <p:clrMapOvr>
@@ -4731,6 +5186,76 @@
           </a:p>
         </p:txBody>
       </p:sp>
+      <p:sp>
+        <p:nvSpPr>
+          <p:cNvPr id="4" name="TextBox 3"/>
+          <p:cNvSpPr txBox="1"/>
+          <p:nvPr/>
+        </p:nvSpPr>
+        <p:spPr>
+          <a:xfrm>
+            <a:off x="640080" y="4128516"/>
+            <a:ext cx="10911535" cy="310896"/>
+          </a:xfrm>
+          <a:prstGeom prst="rect">
+            <a:avLst/>
+          </a:prstGeom>
+          <a:noFill/>
+        </p:spPr>
+        <p:txBody>
+          <a:bodyPr wrap="square">
+            <a:spAutoFit/>
+          </a:bodyPr>
+          <a:lstStyle/>
+          <a:p>
+            <a:pPr algn="ctr"/>
+            <a:r>
+              <a:rPr sz="2000" b="0" i="0">
+                <a:solidFill>
+                  <a:srgbClr val="828282"/>
+                </a:solidFill>
+                <a:latin typeface="Arial"/>
+              </a:rPr>
+              <a:t>そして今、私たちはあなたの民として立ち上がる</a:t>
+            </a:r>
+          </a:p>
+        </p:txBody>
+      </p:sp>
+      <p:sp>
+        <p:nvSpPr>
+          <p:cNvPr id="5" name="TextBox 4"/>
+          <p:cNvSpPr txBox="1"/>
+          <p:nvPr/>
+        </p:nvSpPr>
+        <p:spPr>
+          <a:xfrm>
+            <a:off x="640080" y="4494276"/>
+            <a:ext cx="10911535" cy="310896"/>
+          </a:xfrm>
+          <a:prstGeom prst="rect">
+            <a:avLst/>
+          </a:prstGeom>
+          <a:noFill/>
+        </p:spPr>
+        <p:txBody>
+          <a:bodyPr wrap="square">
+            <a:spAutoFit/>
+          </a:bodyPr>
+          <a:lstStyle/>
+          <a:p>
+            <a:pPr algn="ctr"/>
+            <a:r>
+              <a:rPr sz="2000" b="0" i="0">
+                <a:solidFill>
+                  <a:srgbClr val="828282"/>
+                </a:solidFill>
+                <a:latin typeface="Arial"/>
+              </a:rPr>
+              <a:t>解放を歌う</a:t>
+            </a:r>
+          </a:p>
+        </p:txBody>
+      </p:sp>
     </p:spTree>
   </p:cSld>
   <p:clrMapOvr>
@@ -4827,6 +5352,76 @@
           </a:p>
         </p:txBody>
       </p:sp>
+      <p:sp>
+        <p:nvSpPr>
+          <p:cNvPr id="4" name="TextBox 3"/>
+          <p:cNvSpPr txBox="1"/>
+          <p:nvPr/>
+        </p:nvSpPr>
+        <p:spPr>
+          <a:xfrm>
+            <a:off x="640080" y="4128516"/>
+            <a:ext cx="10911535" cy="310896"/>
+          </a:xfrm>
+          <a:prstGeom prst="rect">
+            <a:avLst/>
+          </a:prstGeom>
+          <a:noFill/>
+        </p:spPr>
+        <p:txBody>
+          <a:bodyPr wrap="square">
+            <a:spAutoFit/>
+          </a:bodyPr>
+          <a:lstStyle/>
+          <a:p>
+            <a:pPr algn="ctr"/>
+            <a:r>
+              <a:rPr sz="2000" b="0" i="0">
+                <a:solidFill>
+                  <a:srgbClr val="828282"/>
+                </a:solidFill>
+                <a:latin typeface="Arial"/>
+              </a:rPr>
+              <a:t>あなたの愛が私たちを見つけた</a:t>
+            </a:r>
+          </a:p>
+        </p:txBody>
+      </p:sp>
+      <p:sp>
+        <p:nvSpPr>
+          <p:cNvPr id="5" name="TextBox 4"/>
+          <p:cNvSpPr txBox="1"/>
+          <p:nvPr/>
+        </p:nvSpPr>
+        <p:spPr>
+          <a:xfrm>
+            <a:off x="640080" y="4494276"/>
+            <a:ext cx="10911535" cy="310896"/>
+          </a:xfrm>
+          <a:prstGeom prst="rect">
+            <a:avLst/>
+          </a:prstGeom>
+          <a:noFill/>
+        </p:spPr>
+        <p:txBody>
+          <a:bodyPr wrap="square">
+            <a:spAutoFit/>
+          </a:bodyPr>
+          <a:lstStyle/>
+          <a:p>
+            <a:pPr algn="ctr"/>
+            <a:r>
+              <a:rPr sz="2000" b="0" i="0">
+                <a:solidFill>
+                  <a:srgbClr val="828282"/>
+                </a:solidFill>
+                <a:latin typeface="Arial"/>
+              </a:rPr>
+              <a:t>死が私たちを捕らえていたとき</a:t>
+            </a:r>
+          </a:p>
+        </p:txBody>
+      </p:sp>
     </p:spTree>
   </p:cSld>
   <p:clrMapOvr>
@@ -4923,6 +5518,76 @@
           </a:p>
         </p:txBody>
       </p:sp>
+      <p:sp>
+        <p:nvSpPr>
+          <p:cNvPr id="4" name="TextBox 3"/>
+          <p:cNvSpPr txBox="1"/>
+          <p:nvPr/>
+        </p:nvSpPr>
+        <p:spPr>
+          <a:xfrm>
+            <a:off x="640080" y="4128516"/>
+            <a:ext cx="10911535" cy="310896"/>
+          </a:xfrm>
+          <a:prstGeom prst="rect">
+            <a:avLst/>
+          </a:prstGeom>
+          <a:noFill/>
+        </p:spPr>
+        <p:txBody>
+          <a:bodyPr wrap="square">
+            <a:spAutoFit/>
+          </a:bodyPr>
+          <a:lstStyle/>
+          <a:p>
+            <a:pPr algn="ctr"/>
+            <a:r>
+              <a:rPr sz="2000" b="0" i="0">
+                <a:solidFill>
+                  <a:srgbClr val="828282"/>
+                </a:solidFill>
+                <a:latin typeface="Arial"/>
+              </a:rPr>
+              <a:t>ただあなただけが救える</a:t>
+            </a:r>
+          </a:p>
+        </p:txBody>
+      </p:sp>
+      <p:sp>
+        <p:nvSpPr>
+          <p:cNvPr id="5" name="TextBox 4"/>
+          <p:cNvSpPr txBox="1"/>
+          <p:nvPr/>
+        </p:nvSpPr>
+        <p:spPr>
+          <a:xfrm>
+            <a:off x="640080" y="4494276"/>
+            <a:ext cx="10911535" cy="310896"/>
+          </a:xfrm>
+          <a:prstGeom prst="rect">
+            <a:avLst/>
+          </a:prstGeom>
+          <a:noFill/>
+        </p:spPr>
+        <p:txBody>
+          <a:bodyPr wrap="square">
+            <a:spAutoFit/>
+          </a:bodyPr>
+          <a:lstStyle/>
+          <a:p>
+            <a:pPr algn="ctr"/>
+            <a:r>
+              <a:rPr sz="2000" b="0" i="0">
+                <a:solidFill>
+                  <a:srgbClr val="828282"/>
+                </a:solidFill>
+                <a:latin typeface="Arial"/>
+              </a:rPr>
+              <a:t>ただあなただけが主である</a:t>
+            </a:r>
+          </a:p>
+        </p:txBody>
+      </p:sp>
     </p:spTree>
   </p:cSld>
   <p:clrMapOvr>
@@ -5351,6 +6016,76 @@
           </a:p>
         </p:txBody>
       </p:sp>
+      <p:sp>
+        <p:nvSpPr>
+          <p:cNvPr id="4" name="TextBox 3"/>
+          <p:cNvSpPr txBox="1"/>
+          <p:nvPr/>
+        </p:nvSpPr>
+        <p:spPr>
+          <a:xfrm>
+            <a:off x="640080" y="4128516"/>
+            <a:ext cx="10911535" cy="310896"/>
+          </a:xfrm>
+          <a:prstGeom prst="rect">
+            <a:avLst/>
+          </a:prstGeom>
+          <a:noFill/>
+        </p:spPr>
+        <p:txBody>
+          <a:bodyPr wrap="square">
+            <a:spAutoFit/>
+          </a:bodyPr>
+          <a:lstStyle/>
+          <a:p>
+            <a:pPr algn="ctr"/>
+            <a:r>
+              <a:rPr sz="2000" b="0" i="0">
+                <a:solidFill>
+                  <a:srgbClr val="828282"/>
+                </a:solidFill>
+                <a:latin typeface="Arial"/>
+              </a:rPr>
+              <a:t>恥は海より深かった</a:t>
+            </a:r>
+          </a:p>
+        </p:txBody>
+      </p:sp>
+      <p:sp>
+        <p:nvSpPr>
+          <p:cNvPr id="5" name="TextBox 4"/>
+          <p:cNvSpPr txBox="1"/>
+          <p:nvPr/>
+        </p:nvSpPr>
+        <p:spPr>
+          <a:xfrm>
+            <a:off x="640080" y="4494276"/>
+            <a:ext cx="10911535" cy="310896"/>
+          </a:xfrm>
+          <a:prstGeom prst="rect">
+            <a:avLst/>
+          </a:prstGeom>
+          <a:noFill/>
+        </p:spPr>
+        <p:txBody>
+          <a:bodyPr wrap="square">
+            <a:spAutoFit/>
+          </a:bodyPr>
+          <a:lstStyle/>
+          <a:p>
+            <a:pPr algn="ctr"/>
+            <a:r>
+              <a:rPr sz="2000" b="0" i="0">
+                <a:solidFill>
+                  <a:srgbClr val="828282"/>
+                </a:solidFill>
+                <a:latin typeface="Arial"/>
+              </a:rPr>
+              <a:t>しかしあなたの愛はさらに深い</a:t>
+            </a:r>
+          </a:p>
+        </p:txBody>
+      </p:sp>
     </p:spTree>
   </p:cSld>
   <p:clrMapOvr>
@@ -5447,6 +6182,76 @@
           </a:p>
         </p:txBody>
       </p:sp>
+      <p:sp>
+        <p:nvSpPr>
+          <p:cNvPr id="4" name="TextBox 3"/>
+          <p:cNvSpPr txBox="1"/>
+          <p:nvPr/>
+        </p:nvSpPr>
+        <p:spPr>
+          <a:xfrm>
+            <a:off x="640080" y="4128516"/>
+            <a:ext cx="10911535" cy="310896"/>
+          </a:xfrm>
+          <a:prstGeom prst="rect">
+            <a:avLst/>
+          </a:prstGeom>
+          <a:noFill/>
+        </p:spPr>
+        <p:txBody>
+          <a:bodyPr wrap="square">
+            <a:spAutoFit/>
+          </a:bodyPr>
+          <a:lstStyle/>
+          <a:p>
+            <a:pPr algn="ctr"/>
+            <a:r>
+              <a:rPr sz="2000" b="0" i="0">
+                <a:solidFill>
+                  <a:srgbClr val="828282"/>
+                </a:solidFill>
+                <a:latin typeface="Arial"/>
+              </a:rPr>
+              <a:t>ただあなただけが救える</a:t>
+            </a:r>
+          </a:p>
+        </p:txBody>
+      </p:sp>
+      <p:sp>
+        <p:nvSpPr>
+          <p:cNvPr id="5" name="TextBox 4"/>
+          <p:cNvSpPr txBox="1"/>
+          <p:nvPr/>
+        </p:nvSpPr>
+        <p:spPr>
+          <a:xfrm>
+            <a:off x="640080" y="4494276"/>
+            <a:ext cx="10911535" cy="310896"/>
+          </a:xfrm>
+          <a:prstGeom prst="rect">
+            <a:avLst/>
+          </a:prstGeom>
+          <a:noFill/>
+        </p:spPr>
+        <p:txBody>
+          <a:bodyPr wrap="square">
+            <a:spAutoFit/>
+          </a:bodyPr>
+          <a:lstStyle/>
+          <a:p>
+            <a:pPr algn="ctr"/>
+            <a:r>
+              <a:rPr sz="2000" b="0" i="0">
+                <a:solidFill>
+                  <a:srgbClr val="828282"/>
+                </a:solidFill>
+                <a:latin typeface="Arial"/>
+              </a:rPr>
+              <a:t>ただあなただけが贖える</a:t>
+            </a:r>
+          </a:p>
+        </p:txBody>
+      </p:sp>
     </p:spTree>
   </p:cSld>
   <p:clrMapOvr>
@@ -5543,6 +6348,76 @@
           </a:p>
         </p:txBody>
       </p:sp>
+      <p:sp>
+        <p:nvSpPr>
+          <p:cNvPr id="4" name="TextBox 3"/>
+          <p:cNvSpPr txBox="1"/>
+          <p:nvPr/>
+        </p:nvSpPr>
+        <p:spPr>
+          <a:xfrm>
+            <a:off x="640080" y="4128516"/>
+            <a:ext cx="10911535" cy="310896"/>
+          </a:xfrm>
+          <a:prstGeom prst="rect">
+            <a:avLst/>
+          </a:prstGeom>
+          <a:noFill/>
+        </p:spPr>
+        <p:txBody>
+          <a:bodyPr wrap="square">
+            <a:spAutoFit/>
+          </a:bodyPr>
+          <a:lstStyle/>
+          <a:p>
+            <a:pPr algn="ctr"/>
+            <a:r>
+              <a:rPr sz="2000" b="0" i="0">
+                <a:solidFill>
+                  <a:srgbClr val="828282"/>
+                </a:solidFill>
+                <a:latin typeface="Arial"/>
+              </a:rPr>
+              <a:t>ただあなただけが私たちを墓から引き上げられる</a:t>
+            </a:r>
+          </a:p>
+        </p:txBody>
+      </p:sp>
+      <p:sp>
+        <p:nvSpPr>
+          <p:cNvPr id="5" name="TextBox 4"/>
+          <p:cNvSpPr txBox="1"/>
+          <p:nvPr/>
+        </p:nvSpPr>
+        <p:spPr>
+          <a:xfrm>
+            <a:off x="640080" y="4494276"/>
+            <a:ext cx="10911535" cy="310896"/>
+          </a:xfrm>
+          <a:prstGeom prst="rect">
+            <a:avLst/>
+          </a:prstGeom>
+          <a:noFill/>
+        </p:spPr>
+        <p:txBody>
+          <a:bodyPr wrap="square">
+            <a:spAutoFit/>
+          </a:bodyPr>
+          <a:lstStyle/>
+          <a:p>
+            <a:pPr algn="ctr"/>
+            <a:r>
+              <a:rPr sz="2000" b="0" i="0">
+                <a:solidFill>
+                  <a:srgbClr val="828282"/>
+                </a:solidFill>
+                <a:latin typeface="Arial"/>
+              </a:rPr>
+              <a:t>あなたは私たちのもとに降りてこられた</a:t>
+            </a:r>
+          </a:p>
+        </p:txBody>
+      </p:sp>
     </p:spTree>
   </p:cSld>
   <p:clrMapOvr>
@@ -5639,6 +6514,76 @@
           </a:p>
         </p:txBody>
       </p:sp>
+      <p:sp>
+        <p:nvSpPr>
+          <p:cNvPr id="4" name="TextBox 3"/>
+          <p:cNvSpPr txBox="1"/>
+          <p:nvPr/>
+        </p:nvSpPr>
+        <p:spPr>
+          <a:xfrm>
+            <a:off x="640080" y="4128516"/>
+            <a:ext cx="10911535" cy="310896"/>
+          </a:xfrm>
+          <a:prstGeom prst="rect">
+            <a:avLst/>
+          </a:prstGeom>
+          <a:noFill/>
+        </p:spPr>
+        <p:txBody>
+          <a:bodyPr wrap="square">
+            <a:spAutoFit/>
+          </a:bodyPr>
+          <a:lstStyle/>
+          <a:p>
+            <a:pPr algn="ctr"/>
+            <a:r>
+              <a:rPr sz="2000" b="0" i="0">
+                <a:solidFill>
+                  <a:srgbClr val="828282"/>
+                </a:solidFill>
+                <a:latin typeface="Arial"/>
+              </a:rPr>
+              <a:t>私たちを死から救い出してくださった</a:t>
+            </a:r>
+          </a:p>
+        </p:txBody>
+      </p:sp>
+      <p:sp>
+        <p:nvSpPr>
+          <p:cNvPr id="5" name="TextBox 4"/>
+          <p:cNvSpPr txBox="1"/>
+          <p:nvPr/>
+        </p:nvSpPr>
+        <p:spPr>
+          <a:xfrm>
+            <a:off x="640080" y="4494276"/>
+            <a:ext cx="10911535" cy="310896"/>
+          </a:xfrm>
+          <a:prstGeom prst="rect">
+            <a:avLst/>
+          </a:prstGeom>
+          <a:noFill/>
+        </p:spPr>
+        <p:txBody>
+          <a:bodyPr wrap="square">
+            <a:spAutoFit/>
+          </a:bodyPr>
+          <a:lstStyle/>
+          <a:p>
+            <a:pPr algn="ctr"/>
+            <a:r>
+              <a:rPr sz="2000" b="0" i="0">
+                <a:solidFill>
+                  <a:srgbClr val="828282"/>
+                </a:solidFill>
+                <a:latin typeface="Arial"/>
+              </a:rPr>
+              <a:t>すべての賛美はあなただけのもの</a:t>
+            </a:r>
+          </a:p>
+        </p:txBody>
+      </p:sp>
     </p:spTree>
   </p:cSld>
   <p:clrMapOvr>
@@ -5735,6 +6680,76 @@
           </a:p>
         </p:txBody>
       </p:sp>
+      <p:sp>
+        <p:nvSpPr>
+          <p:cNvPr id="4" name="TextBox 3"/>
+          <p:cNvSpPr txBox="1"/>
+          <p:nvPr/>
+        </p:nvSpPr>
+        <p:spPr>
+          <a:xfrm>
+            <a:off x="640080" y="4128516"/>
+            <a:ext cx="10911535" cy="310896"/>
+          </a:xfrm>
+          <a:prstGeom prst="rect">
+            <a:avLst/>
+          </a:prstGeom>
+          <a:noFill/>
+        </p:spPr>
+        <p:txBody>
+          <a:bodyPr wrap="square">
+            <a:spAutoFit/>
+          </a:bodyPr>
+          <a:lstStyle/>
+          <a:p>
+            <a:pPr algn="ctr"/>
+            <a:r>
+              <a:rPr sz="2000" b="0" i="0">
+                <a:solidFill>
+                  <a:srgbClr val="828282"/>
+                </a:solidFill>
+                <a:latin typeface="Arial"/>
+              </a:rPr>
+              <a:t>そして今、私たちはあなたの民として立ち上がる</a:t>
+            </a:r>
+          </a:p>
+        </p:txBody>
+      </p:sp>
+      <p:sp>
+        <p:nvSpPr>
+          <p:cNvPr id="5" name="TextBox 4"/>
+          <p:cNvSpPr txBox="1"/>
+          <p:nvPr/>
+        </p:nvSpPr>
+        <p:spPr>
+          <a:xfrm>
+            <a:off x="640080" y="4494276"/>
+            <a:ext cx="10911535" cy="310896"/>
+          </a:xfrm>
+          <a:prstGeom prst="rect">
+            <a:avLst/>
+          </a:prstGeom>
+          <a:noFill/>
+        </p:spPr>
+        <p:txBody>
+          <a:bodyPr wrap="square">
+            <a:spAutoFit/>
+          </a:bodyPr>
+          <a:lstStyle/>
+          <a:p>
+            <a:pPr algn="ctr"/>
+            <a:r>
+              <a:rPr sz="2000" b="0" i="0">
+                <a:solidFill>
+                  <a:srgbClr val="828282"/>
+                </a:solidFill>
+                <a:latin typeface="Arial"/>
+              </a:rPr>
+              <a:t>解放を歌う</a:t>
+            </a:r>
+          </a:p>
+        </p:txBody>
+      </p:sp>
     </p:spTree>
   </p:cSld>
   <p:clrMapOvr>
@@ -5831,6 +6846,76 @@
           </a:p>
         </p:txBody>
       </p:sp>
+      <p:sp>
+        <p:nvSpPr>
+          <p:cNvPr id="4" name="TextBox 3"/>
+          <p:cNvSpPr txBox="1"/>
+          <p:nvPr/>
+        </p:nvSpPr>
+        <p:spPr>
+          <a:xfrm>
+            <a:off x="640080" y="4128516"/>
+            <a:ext cx="10911535" cy="310896"/>
+          </a:xfrm>
+          <a:prstGeom prst="rect">
+            <a:avLst/>
+          </a:prstGeom>
+          <a:noFill/>
+        </p:spPr>
+        <p:txBody>
+          <a:bodyPr wrap="square">
+            <a:spAutoFit/>
+          </a:bodyPr>
+          <a:lstStyle/>
+          <a:p>
+            <a:pPr algn="ctr"/>
+            <a:r>
+              <a:rPr sz="2000" b="0" i="0">
+                <a:solidFill>
+                  <a:srgbClr val="828282"/>
+                </a:solidFill>
+                <a:latin typeface="Arial"/>
+              </a:rPr>
+              <a:t>恥は海より深かった</a:t>
+            </a:r>
+          </a:p>
+        </p:txBody>
+      </p:sp>
+      <p:sp>
+        <p:nvSpPr>
+          <p:cNvPr id="5" name="TextBox 4"/>
+          <p:cNvSpPr txBox="1"/>
+          <p:nvPr/>
+        </p:nvSpPr>
+        <p:spPr>
+          <a:xfrm>
+            <a:off x="640080" y="4494276"/>
+            <a:ext cx="10911535" cy="310896"/>
+          </a:xfrm>
+          <a:prstGeom prst="rect">
+            <a:avLst/>
+          </a:prstGeom>
+          <a:noFill/>
+        </p:spPr>
+        <p:txBody>
+          <a:bodyPr wrap="square">
+            <a:spAutoFit/>
+          </a:bodyPr>
+          <a:lstStyle/>
+          <a:p>
+            <a:pPr algn="ctr"/>
+            <a:r>
+              <a:rPr sz="2000" b="0" i="0">
+                <a:solidFill>
+                  <a:srgbClr val="828282"/>
+                </a:solidFill>
+                <a:latin typeface="Arial"/>
+              </a:rPr>
+              <a:t>しかしあなたの愛はさらに深い</a:t>
+            </a:r>
+          </a:p>
+        </p:txBody>
+      </p:sp>
     </p:spTree>
   </p:cSld>
   <p:clrMapOvr>
@@ -5927,6 +7012,76 @@
           </a:p>
         </p:txBody>
       </p:sp>
+      <p:sp>
+        <p:nvSpPr>
+          <p:cNvPr id="4" name="TextBox 3"/>
+          <p:cNvSpPr txBox="1"/>
+          <p:nvPr/>
+        </p:nvSpPr>
+        <p:spPr>
+          <a:xfrm>
+            <a:off x="640080" y="4128516"/>
+            <a:ext cx="10911535" cy="310896"/>
+          </a:xfrm>
+          <a:prstGeom prst="rect">
+            <a:avLst/>
+          </a:prstGeom>
+          <a:noFill/>
+        </p:spPr>
+        <p:txBody>
+          <a:bodyPr wrap="square">
+            <a:spAutoFit/>
+          </a:bodyPr>
+          <a:lstStyle/>
+          <a:p>
+            <a:pPr algn="ctr"/>
+            <a:r>
+              <a:rPr sz="2000" b="0" i="0">
+                <a:solidFill>
+                  <a:srgbClr val="828282"/>
+                </a:solidFill>
+                <a:latin typeface="Arial"/>
+              </a:rPr>
+              <a:t>ただあなただけが救える</a:t>
+            </a:r>
+          </a:p>
+        </p:txBody>
+      </p:sp>
+      <p:sp>
+        <p:nvSpPr>
+          <p:cNvPr id="5" name="TextBox 4"/>
+          <p:cNvSpPr txBox="1"/>
+          <p:nvPr/>
+        </p:nvSpPr>
+        <p:spPr>
+          <a:xfrm>
+            <a:off x="640080" y="4494276"/>
+            <a:ext cx="10911535" cy="310896"/>
+          </a:xfrm>
+          <a:prstGeom prst="rect">
+            <a:avLst/>
+          </a:prstGeom>
+          <a:noFill/>
+        </p:spPr>
+        <p:txBody>
+          <a:bodyPr wrap="square">
+            <a:spAutoFit/>
+          </a:bodyPr>
+          <a:lstStyle/>
+          <a:p>
+            <a:pPr algn="ctr"/>
+            <a:r>
+              <a:rPr sz="2000" b="0" i="0">
+                <a:solidFill>
+                  <a:srgbClr val="828282"/>
+                </a:solidFill>
+                <a:latin typeface="Arial"/>
+              </a:rPr>
+              <a:t>ただあなただけが贖える</a:t>
+            </a:r>
+          </a:p>
+        </p:txBody>
+      </p:sp>
     </p:spTree>
   </p:cSld>
   <p:clrMapOvr>
@@ -6023,6 +7178,76 @@
           </a:p>
         </p:txBody>
       </p:sp>
+      <p:sp>
+        <p:nvSpPr>
+          <p:cNvPr id="4" name="TextBox 3"/>
+          <p:cNvSpPr txBox="1"/>
+          <p:nvPr/>
+        </p:nvSpPr>
+        <p:spPr>
+          <a:xfrm>
+            <a:off x="640080" y="4128516"/>
+            <a:ext cx="10911535" cy="310896"/>
+          </a:xfrm>
+          <a:prstGeom prst="rect">
+            <a:avLst/>
+          </a:prstGeom>
+          <a:noFill/>
+        </p:spPr>
+        <p:txBody>
+          <a:bodyPr wrap="square">
+            <a:spAutoFit/>
+          </a:bodyPr>
+          <a:lstStyle/>
+          <a:p>
+            <a:pPr algn="ctr"/>
+            <a:r>
+              <a:rPr sz="2000" b="0" i="0">
+                <a:solidFill>
+                  <a:srgbClr val="828282"/>
+                </a:solidFill>
+                <a:latin typeface="Arial"/>
+              </a:rPr>
+              <a:t>ただあなただけが私たちを墓から引き上げられる</a:t>
+            </a:r>
+          </a:p>
+        </p:txBody>
+      </p:sp>
+      <p:sp>
+        <p:nvSpPr>
+          <p:cNvPr id="5" name="TextBox 4"/>
+          <p:cNvSpPr txBox="1"/>
+          <p:nvPr/>
+        </p:nvSpPr>
+        <p:spPr>
+          <a:xfrm>
+            <a:off x="640080" y="4494276"/>
+            <a:ext cx="10911535" cy="310896"/>
+          </a:xfrm>
+          <a:prstGeom prst="rect">
+            <a:avLst/>
+          </a:prstGeom>
+          <a:noFill/>
+        </p:spPr>
+        <p:txBody>
+          <a:bodyPr wrap="square">
+            <a:spAutoFit/>
+          </a:bodyPr>
+          <a:lstStyle/>
+          <a:p>
+            <a:pPr algn="ctr"/>
+            <a:r>
+              <a:rPr sz="2000" b="0" i="0">
+                <a:solidFill>
+                  <a:srgbClr val="828282"/>
+                </a:solidFill>
+                <a:latin typeface="Arial"/>
+              </a:rPr>
+              <a:t>あなたは私たちのもとに降りてこられた</a:t>
+            </a:r>
+          </a:p>
+        </p:txBody>
+      </p:sp>
     </p:spTree>
   </p:cSld>
   <p:clrMapOvr>
@@ -6119,6 +7344,76 @@
           </a:p>
         </p:txBody>
       </p:sp>
+      <p:sp>
+        <p:nvSpPr>
+          <p:cNvPr id="4" name="TextBox 3"/>
+          <p:cNvSpPr txBox="1"/>
+          <p:nvPr/>
+        </p:nvSpPr>
+        <p:spPr>
+          <a:xfrm>
+            <a:off x="640080" y="4128516"/>
+            <a:ext cx="10911535" cy="310896"/>
+          </a:xfrm>
+          <a:prstGeom prst="rect">
+            <a:avLst/>
+          </a:prstGeom>
+          <a:noFill/>
+        </p:spPr>
+        <p:txBody>
+          <a:bodyPr wrap="square">
+            <a:spAutoFit/>
+          </a:bodyPr>
+          <a:lstStyle/>
+          <a:p>
+            <a:pPr algn="ctr"/>
+            <a:r>
+              <a:rPr sz="2000" b="0" i="0">
+                <a:solidFill>
+                  <a:srgbClr val="828282"/>
+                </a:solidFill>
+                <a:latin typeface="Arial"/>
+              </a:rPr>
+              <a:t>私たちを死から救い出してくださった</a:t>
+            </a:r>
+          </a:p>
+        </p:txBody>
+      </p:sp>
+      <p:sp>
+        <p:nvSpPr>
+          <p:cNvPr id="5" name="TextBox 4"/>
+          <p:cNvSpPr txBox="1"/>
+          <p:nvPr/>
+        </p:nvSpPr>
+        <p:spPr>
+          <a:xfrm>
+            <a:off x="640080" y="4494276"/>
+            <a:ext cx="10911535" cy="310896"/>
+          </a:xfrm>
+          <a:prstGeom prst="rect">
+            <a:avLst/>
+          </a:prstGeom>
+          <a:noFill/>
+        </p:spPr>
+        <p:txBody>
+          <a:bodyPr wrap="square">
+            <a:spAutoFit/>
+          </a:bodyPr>
+          <a:lstStyle/>
+          <a:p>
+            <a:pPr algn="ctr"/>
+            <a:r>
+              <a:rPr sz="2000" b="0" i="0">
+                <a:solidFill>
+                  <a:srgbClr val="828282"/>
+                </a:solidFill>
+                <a:latin typeface="Arial"/>
+              </a:rPr>
+              <a:t>すべての賛美はあなただけのもの</a:t>
+            </a:r>
+          </a:p>
+        </p:txBody>
+      </p:sp>
     </p:spTree>
   </p:cSld>
   <p:clrMapOvr>
@@ -6211,6 +7506,76 @@
                 <a:latin typeface="Arial"/>
               </a:rPr>
               <a:t>Cantamos da libertação</a:t>
+            </a:r>
+          </a:p>
+        </p:txBody>
+      </p:sp>
+      <p:sp>
+        <p:nvSpPr>
+          <p:cNvPr id="4" name="TextBox 3"/>
+          <p:cNvSpPr txBox="1"/>
+          <p:nvPr/>
+        </p:nvSpPr>
+        <p:spPr>
+          <a:xfrm>
+            <a:off x="640080" y="4128516"/>
+            <a:ext cx="10911535" cy="310896"/>
+          </a:xfrm>
+          <a:prstGeom prst="rect">
+            <a:avLst/>
+          </a:prstGeom>
+          <a:noFill/>
+        </p:spPr>
+        <p:txBody>
+          <a:bodyPr wrap="square">
+            <a:spAutoFit/>
+          </a:bodyPr>
+          <a:lstStyle/>
+          <a:p>
+            <a:pPr algn="ctr"/>
+            <a:r>
+              <a:rPr sz="2000" b="0" i="0">
+                <a:solidFill>
+                  <a:srgbClr val="828282"/>
+                </a:solidFill>
+                <a:latin typeface="Arial"/>
+              </a:rPr>
+              <a:t>そして今、私たちはあなたの民として立ち上がる</a:t>
+            </a:r>
+          </a:p>
+        </p:txBody>
+      </p:sp>
+      <p:sp>
+        <p:nvSpPr>
+          <p:cNvPr id="5" name="TextBox 4"/>
+          <p:cNvSpPr txBox="1"/>
+          <p:nvPr/>
+        </p:nvSpPr>
+        <p:spPr>
+          <a:xfrm>
+            <a:off x="640080" y="4494276"/>
+            <a:ext cx="10911535" cy="310896"/>
+          </a:xfrm>
+          <a:prstGeom prst="rect">
+            <a:avLst/>
+          </a:prstGeom>
+          <a:noFill/>
+        </p:spPr>
+        <p:txBody>
+          <a:bodyPr wrap="square">
+            <a:spAutoFit/>
+          </a:bodyPr>
+          <a:lstStyle/>
+          <a:p>
+            <a:pPr algn="ctr"/>
+            <a:r>
+              <a:rPr sz="2000" b="0" i="0">
+                <a:solidFill>
+                  <a:srgbClr val="828282"/>
+                </a:solidFill>
+                <a:latin typeface="Arial"/>
+              </a:rPr>
+              <a:t>解放を歌う</a:t>
             </a:r>
           </a:p>
         </p:txBody>
